--- a/make_presentation/templates/templates/flow/no_logo_5.pptx
+++ b/make_presentation/templates/templates/flow/no_logo_5.pptx
@@ -64,20 +64,17 @@
             <a:noAutofit/>
           </a:bodyPr>
           <a:p>
-            <a:r>
-              <a:rPr b="0" lang="en-US" sz="1800" spc="-1" strike="noStrike">
-                <a:solidFill>
-                  <a:srgbClr val="000000"/>
-                </a:solidFill>
-                <a:latin typeface="Calibri"/>
-              </a:rPr>
-              <a:t>Для перемещения страницы щёлкните мышью</a:t>
-            </a:r>
-            <a:endParaRPr b="0" lang="en-US" sz="1800" spc="-1" strike="noStrike">
-              <a:solidFill>
-                <a:srgbClr val="000000"/>
-              </a:solidFill>
-              <a:latin typeface="Calibri"/>
+            <a:pPr algn="ctr">
+              <a:buNone/>
+            </a:pPr>
+            <a:r>
+              <a:rPr b="0" lang="en-US" sz="4400" spc="-1" strike="noStrike">
+                <a:latin typeface="Arial"/>
+              </a:rPr>
+              <a:t>Click to move the slide</a:t>
+            </a:r>
+            <a:endParaRPr b="0" lang="en-US" sz="4400" spc="-1" strike="noStrike">
+              <a:latin typeface="Arial"/>
             </a:endParaRPr>
           </a:p>
         </p:txBody>
@@ -111,12 +108,12 @@
           </a:bodyPr>
           <a:p>
             <a:r>
-              <a:rPr b="0" lang="ru-RU" sz="2000" spc="-1" strike="noStrike">
+              <a:rPr b="0" lang="en-US" sz="2000" spc="-1" strike="noStrike">
                 <a:latin typeface="Arial"/>
               </a:rPr>
-              <a:t>Для правки формата примечаний щёлкните мышью</a:t>
-            </a:r>
-            <a:endParaRPr b="0" lang="ru-RU" sz="2000" spc="-1" strike="noStrike">
+              <a:t>Click to edit the notes format</a:t>
+            </a:r>
+            <a:endParaRPr b="0" lang="en-US" sz="2000" spc="-1" strike="noStrike">
               <a:latin typeface="Arial"/>
             </a:endParaRPr>
           </a:p>
@@ -151,12 +148,12 @@
           </a:bodyPr>
           <a:p>
             <a:r>
-              <a:rPr b="0" lang="ru-RU" sz="1400" spc="-1" strike="noStrike">
+              <a:rPr b="0" lang="en-US" sz="1400" spc="-1" strike="noStrike">
                 <a:latin typeface="Times New Roman"/>
               </a:rPr>
-              <a:t>&lt;верхний колонтитул&gt;</a:t>
-            </a:r>
-            <a:endParaRPr b="0" lang="ru-RU" sz="1400" spc="-1" strike="noStrike">
+              <a:t>&lt;header&gt;</a:t>
+            </a:r>
+            <a:endParaRPr b="0" lang="en-US" sz="1400" spc="-1" strike="noStrike">
               <a:latin typeface="Times New Roman"/>
             </a:endParaRPr>
           </a:p>
@@ -192,7 +189,7 @@
           <a:lstStyle>
             <a:lvl1pPr algn="r">
               <a:buNone/>
-              <a:defRPr b="0" lang="ru-RU" sz="1400" spc="-1" strike="noStrike">
+              <a:defRPr b="0" lang="en-US" sz="1400" spc="-1" strike="noStrike">
                 <a:latin typeface="Times New Roman"/>
               </a:defRPr>
             </a:lvl1pPr>
@@ -202,12 +199,12 @@
               <a:buNone/>
             </a:pPr>
             <a:r>
-              <a:rPr b="0" lang="ru-RU" sz="1400" spc="-1" strike="noStrike">
+              <a:rPr b="0" lang="en-US" sz="1400" spc="-1" strike="noStrike">
                 <a:latin typeface="Times New Roman"/>
               </a:rPr>
-              <a:t>&lt;дата/время&gt;</a:t>
-            </a:r>
-            <a:endParaRPr b="0" lang="ru-RU" sz="1400" spc="-1" strike="noStrike">
+              <a:t>&lt;date/time&gt;</a:t>
+            </a:r>
+            <a:endParaRPr b="0" lang="en-US" sz="1400" spc="-1" strike="noStrike">
               <a:latin typeface="Times New Roman"/>
             </a:endParaRPr>
           </a:p>
@@ -242,19 +239,19 @@
           </a:bodyPr>
           <a:lstStyle>
             <a:lvl1pPr>
-              <a:defRPr b="0" lang="ru-RU" sz="1400" spc="-1" strike="noStrike">
+              <a:defRPr b="0" lang="en-US" sz="1400" spc="-1" strike="noStrike">
                 <a:latin typeface="Times New Roman"/>
               </a:defRPr>
             </a:lvl1pPr>
           </a:lstStyle>
           <a:p>
             <a:r>
-              <a:rPr b="0" lang="ru-RU" sz="1400" spc="-1" strike="noStrike">
+              <a:rPr b="0" lang="en-US" sz="1400" spc="-1" strike="noStrike">
                 <a:latin typeface="Times New Roman"/>
               </a:rPr>
-              <a:t>&lt;нижний колонтитул&gt;</a:t>
-            </a:r>
-            <a:endParaRPr b="0" lang="ru-RU" sz="1400" spc="-1" strike="noStrike">
+              <a:t>&lt;footer&gt;</a:t>
+            </a:r>
+            <a:endParaRPr b="0" lang="en-US" sz="1400" spc="-1" strike="noStrike">
               <a:latin typeface="Times New Roman"/>
             </a:endParaRPr>
           </a:p>
@@ -290,7 +287,7 @@
           <a:lstStyle>
             <a:lvl1pPr algn="r">
               <a:buNone/>
-              <a:defRPr b="0" lang="ru-RU" sz="1400" spc="-1" strike="noStrike">
+              <a:defRPr b="0" lang="en-US" sz="1400" spc="-1" strike="noStrike">
                 <a:latin typeface="Times New Roman"/>
               </a:defRPr>
             </a:lvl1pPr>
@@ -299,13 +296,13 @@
             <a:pPr algn="r">
               <a:buNone/>
             </a:pPr>
-            <a:fld id="{013A37ED-5A4F-41BF-893D-3C5C00A3873B}" type="slidenum">
-              <a:rPr b="0" lang="ru-RU" sz="1400" spc="-1" strike="noStrike">
+            <a:fld id="{B94FC5BB-513B-4C56-9813-D733BBA4C600}" type="slidenum">
+              <a:rPr b="0" lang="en-US" sz="1400" spc="-1" strike="noStrike">
                 <a:latin typeface="Times New Roman"/>
               </a:rPr>
-              <a:t>&lt;номер&gt;</a:t>
+              <a:t>&lt;number&gt;</a:t>
             </a:fld>
-            <a:endParaRPr b="0" lang="ru-RU" sz="1400" spc="-1" strike="noStrike">
+            <a:endParaRPr b="0" lang="en-US" sz="1400" spc="-1" strike="noStrike">
               <a:latin typeface="Times New Roman"/>
             </a:endParaRPr>
           </a:p>
@@ -336,7 +333,7 @@
       </p:grpSpPr>
       <p:sp>
         <p:nvSpPr>
-          <p:cNvPr id="82" name="PlaceHolder 1"/>
+          <p:cNvPr id="81" name="PlaceHolder 1"/>
           <p:cNvSpPr>
             <a:spLocks noGrp="1"/>
           </p:cNvSpPr>
@@ -347,19 +344,19 @@
         <p:spPr>
           <a:xfrm>
             <a:off x="685800" y="1143000"/>
-            <a:ext cx="5486040" cy="3085920"/>
-          </a:xfrm>
-          <a:prstGeom prst="rect">
-            <a:avLst/>
-          </a:prstGeom>
-          <a:ln w="0">
-            <a:noFill/>
-          </a:ln>
-        </p:spPr>
-      </p:sp>
-      <p:sp>
-        <p:nvSpPr>
-          <p:cNvPr id="83" name="PlaceHolder 2"/>
+            <a:ext cx="5485680" cy="3085560"/>
+          </a:xfrm>
+          <a:prstGeom prst="rect">
+            <a:avLst/>
+          </a:prstGeom>
+          <a:ln w="0">
+            <a:noFill/>
+          </a:ln>
+        </p:spPr>
+      </p:sp>
+      <p:sp>
+        <p:nvSpPr>
+          <p:cNvPr id="82" name="PlaceHolder 2"/>
           <p:cNvSpPr>
             <a:spLocks noGrp="1"/>
           </p:cNvSpPr>
@@ -370,30 +367,30 @@
         <p:spPr>
           <a:xfrm>
             <a:off x="685800" y="4400640"/>
-            <a:ext cx="5486040" cy="3600000"/>
-          </a:xfrm>
-          <a:prstGeom prst="rect">
-            <a:avLst/>
-          </a:prstGeom>
-          <a:noFill/>
-          <a:ln w="0">
-            <a:noFill/>
-          </a:ln>
-        </p:spPr>
-        <p:txBody>
-          <a:bodyPr anchor="t">
+            <a:ext cx="5485680" cy="3599640"/>
+          </a:xfrm>
+          <a:prstGeom prst="rect">
+            <a:avLst/>
+          </a:prstGeom>
+          <a:noFill/>
+          <a:ln w="0">
+            <a:noFill/>
+          </a:ln>
+        </p:spPr>
+        <p:txBody>
+          <a:bodyPr lIns="0" rIns="0" tIns="0" bIns="0" anchor="t">
             <a:noAutofit/>
           </a:bodyPr>
           <a:p>
-            <a:endParaRPr b="0" lang="ru-RU" sz="2000" spc="-1" strike="noStrike">
-              <a:latin typeface="Arial"/>
-            </a:endParaRPr>
-          </a:p>
-        </p:txBody>
-      </p:sp>
-      <p:sp>
-        <p:nvSpPr>
-          <p:cNvPr id="84" name="PlaceHolder 3"/>
+            <a:endParaRPr b="0" lang="en-US" sz="2000" spc="-1" strike="noStrike">
+              <a:latin typeface="Arial"/>
+            </a:endParaRPr>
+          </a:p>
+        </p:txBody>
+      </p:sp>
+      <p:sp>
+        <p:nvSpPr>
+          <p:cNvPr id="83" name="PlaceHolder 3"/>
           <p:cNvSpPr>
             <a:spLocks noGrp="1"/>
           </p:cNvSpPr>
@@ -404,18 +401,18 @@
         <p:spPr>
           <a:xfrm>
             <a:off x="3884760" y="8685360"/>
-            <a:ext cx="2971440" cy="458280"/>
-          </a:xfrm>
-          <a:prstGeom prst="rect">
-            <a:avLst/>
-          </a:prstGeom>
-          <a:noFill/>
-          <a:ln w="0">
-            <a:noFill/>
-          </a:ln>
-        </p:spPr>
-        <p:txBody>
-          <a:bodyPr anchor="b">
+            <a:ext cx="2971080" cy="457920"/>
+          </a:xfrm>
+          <a:prstGeom prst="rect">
+            <a:avLst/>
+          </a:prstGeom>
+          <a:noFill/>
+          <a:ln w="0">
+            <a:noFill/>
+          </a:ln>
+        </p:spPr>
+        <p:txBody>
+          <a:bodyPr lIns="0" rIns="0" tIns="0" bIns="0" anchor="b">
             <a:noAutofit/>
           </a:bodyPr>
           <a:lstStyle>
@@ -436,13 +433,13 @@
               </a:lnSpc>
               <a:buNone/>
             </a:pPr>
-            <a:fld id="{379DC82B-B202-4DAE-A47A-792351E22A77}" type="slidenum">
+            <a:fld id="{5BD9D232-51DE-4B05-AFCB-4392B5173595}" type="slidenum">
               <a:rPr b="0" lang="ru-RU" sz="1200" spc="-1" strike="noStrike">
                 <a:latin typeface="Times New Roman"/>
               </a:rPr>
-              <a:t>&lt;номер&gt;</a:t>
+              <a:t>&lt;number&gt;</a:t>
             </a:fld>
-            <a:endParaRPr b="0" lang="ru-RU" sz="1200" spc="-1" strike="noStrike">
+            <a:endParaRPr b="0" lang="en-US" sz="1200" spc="-1" strike="noStrike">
               <a:latin typeface="Times New Roman"/>
             </a:endParaRPr>
           </a:p>
@@ -477,7 +474,7 @@
             <a:spLocks noGrp="1"/>
           </p:cNvSpPr>
           <p:nvPr>
-            <p:ph type="ftr" idx="2"/>
+            <p:ph type="ftr" idx="1"/>
           </p:nvPr>
         </p:nvSpPr>
         <p:spPr/>
@@ -497,14 +494,14 @@
             <a:spLocks noGrp="1"/>
           </p:cNvSpPr>
           <p:nvPr>
-            <p:ph type="sldNum" idx="3"/>
+            <p:ph type="sldNum" idx="2"/>
           </p:nvPr>
         </p:nvSpPr>
         <p:spPr/>
         <p:txBody>
           <a:bodyPr/>
           <a:p>
-            <a:fld id="{2E58A1AB-157A-484A-AD76-ED39815F8071}" type="slidenum">
+            <a:fld id="{F126615A-C907-440E-ADDD-1182697F10FF}" type="slidenum">
               <a:t>&lt;#&gt;</a:t>
             </a:fld>
           </a:p>
@@ -517,7 +514,7 @@
             <a:spLocks noGrp="1"/>
           </p:cNvSpPr>
           <p:nvPr>
-            <p:ph type="dt" idx="1"/>
+            <p:ph type="dt" idx="3"/>
           </p:nvPr>
         </p:nvSpPr>
         <p:spPr/>
@@ -525,7 +522,7 @@
           <a:bodyPr/>
           <a:p>
             <a:r>
-              <a:rPr lang="ru-RU"/>
+              <a:rPr lang="en-US"/>
               <a:t/>
             </a:r>
           </a:p>
@@ -566,7 +563,7 @@
         <p:spPr>
           <a:xfrm>
             <a:off x="1143000" y="841680"/>
-            <a:ext cx="6857640" cy="1790280"/>
+            <a:ext cx="6857280" cy="1789920"/>
           </a:xfrm>
           <a:prstGeom prst="rect">
             <a:avLst/>
@@ -581,11 +578,11 @@
             <a:noAutofit/>
           </a:bodyPr>
           <a:p>
-            <a:endParaRPr b="0" lang="en-US" sz="1800" spc="-1" strike="noStrike">
-              <a:solidFill>
-                <a:srgbClr val="000000"/>
-              </a:solidFill>
-              <a:latin typeface="Calibri"/>
+            <a:pPr algn="ctr">
+              <a:buNone/>
+            </a:pPr>
+            <a:endParaRPr b="0" lang="en-US" sz="4400" spc="-1" strike="noStrike">
+              <a:latin typeface="Arial"/>
             </a:endParaRPr>
           </a:p>
         </p:txBody>
@@ -618,20 +615,8 @@
             <a:normAutofit/>
           </a:bodyPr>
           <a:p>
-            <a:pPr>
-              <a:lnSpc>
-                <a:spcPct val="90000"/>
-              </a:lnSpc>
-              <a:spcBef>
-                <a:spcPts val="1417"/>
-              </a:spcBef>
-              <a:buNone/>
-            </a:pPr>
-            <a:endParaRPr b="0" lang="en-US" sz="2100" spc="-1" strike="noStrike">
-              <a:solidFill>
-                <a:srgbClr val="000000"/>
-              </a:solidFill>
-              <a:latin typeface="Calibri"/>
+            <a:endParaRPr b="0" lang="en-US" sz="3200" spc="-1" strike="noStrike">
+              <a:latin typeface="Arial"/>
             </a:endParaRPr>
           </a:p>
         </p:txBody>
@@ -664,20 +649,8 @@
             <a:normAutofit/>
           </a:bodyPr>
           <a:p>
-            <a:pPr>
-              <a:lnSpc>
-                <a:spcPct val="90000"/>
-              </a:lnSpc>
-              <a:spcBef>
-                <a:spcPts val="1417"/>
-              </a:spcBef>
-              <a:buNone/>
-            </a:pPr>
-            <a:endParaRPr b="0" lang="en-US" sz="2100" spc="-1" strike="noStrike">
-              <a:solidFill>
-                <a:srgbClr val="000000"/>
-              </a:solidFill>
-              <a:latin typeface="Calibri"/>
+            <a:endParaRPr b="0" lang="en-US" sz="3200" spc="-1" strike="noStrike">
+              <a:latin typeface="Arial"/>
             </a:endParaRPr>
           </a:p>
         </p:txBody>
@@ -689,7 +662,7 @@
             <a:spLocks noGrp="1"/>
           </p:cNvSpPr>
           <p:nvPr>
-            <p:ph type="ftr" idx="2"/>
+            <p:ph type="ftr" idx="1"/>
           </p:nvPr>
         </p:nvSpPr>
         <p:spPr/>
@@ -709,14 +682,14 @@
             <a:spLocks noGrp="1"/>
           </p:cNvSpPr>
           <p:nvPr>
-            <p:ph type="sldNum" idx="3"/>
+            <p:ph type="sldNum" idx="2"/>
           </p:nvPr>
         </p:nvSpPr>
         <p:spPr/>
         <p:txBody>
           <a:bodyPr/>
           <a:p>
-            <a:fld id="{3686D058-B751-4E0A-B6FD-B529B72696A0}" type="slidenum">
+            <a:fld id="{5D2EB039-519E-424F-8F34-4733AAEEAF74}" type="slidenum">
               <a:t>&lt;#&gt;</a:t>
             </a:fld>
           </a:p>
@@ -729,7 +702,7 @@
             <a:spLocks noGrp="1"/>
           </p:cNvSpPr>
           <p:nvPr>
-            <p:ph type="dt" idx="1"/>
+            <p:ph type="dt" idx="3"/>
           </p:nvPr>
         </p:nvSpPr>
         <p:spPr/>
@@ -737,7 +710,7 @@
           <a:bodyPr/>
           <a:p>
             <a:r>
-              <a:rPr lang="ru-RU"/>
+              <a:rPr lang="en-US"/>
               <a:t/>
             </a:r>
           </a:p>
@@ -778,7 +751,7 @@
         <p:spPr>
           <a:xfrm>
             <a:off x="1143000" y="841680"/>
-            <a:ext cx="6857640" cy="1790280"/>
+            <a:ext cx="6857280" cy="1789920"/>
           </a:xfrm>
           <a:prstGeom prst="rect">
             <a:avLst/>
@@ -793,11 +766,11 @@
             <a:noAutofit/>
           </a:bodyPr>
           <a:p>
-            <a:endParaRPr b="0" lang="en-US" sz="1800" spc="-1" strike="noStrike">
-              <a:solidFill>
-                <a:srgbClr val="000000"/>
-              </a:solidFill>
-              <a:latin typeface="Calibri"/>
+            <a:pPr algn="ctr">
+              <a:buNone/>
+            </a:pPr>
+            <a:endParaRPr b="0" lang="en-US" sz="4400" spc="-1" strike="noStrike">
+              <a:latin typeface="Arial"/>
             </a:endParaRPr>
           </a:p>
         </p:txBody>
@@ -830,20 +803,8 @@
             <a:normAutofit/>
           </a:bodyPr>
           <a:p>
-            <a:pPr>
-              <a:lnSpc>
-                <a:spcPct val="90000"/>
-              </a:lnSpc>
-              <a:spcBef>
-                <a:spcPts val="1417"/>
-              </a:spcBef>
-              <a:buNone/>
-            </a:pPr>
-            <a:endParaRPr b="0" lang="en-US" sz="2100" spc="-1" strike="noStrike">
-              <a:solidFill>
-                <a:srgbClr val="000000"/>
-              </a:solidFill>
-              <a:latin typeface="Calibri"/>
+            <a:endParaRPr b="0" lang="en-US" sz="3200" spc="-1" strike="noStrike">
+              <a:latin typeface="Arial"/>
             </a:endParaRPr>
           </a:p>
         </p:txBody>
@@ -876,20 +837,8 @@
             <a:normAutofit/>
           </a:bodyPr>
           <a:p>
-            <a:pPr>
-              <a:lnSpc>
-                <a:spcPct val="90000"/>
-              </a:lnSpc>
-              <a:spcBef>
-                <a:spcPts val="1417"/>
-              </a:spcBef>
-              <a:buNone/>
-            </a:pPr>
-            <a:endParaRPr b="0" lang="en-US" sz="2100" spc="-1" strike="noStrike">
-              <a:solidFill>
-                <a:srgbClr val="000000"/>
-              </a:solidFill>
-              <a:latin typeface="Calibri"/>
+            <a:endParaRPr b="0" lang="en-US" sz="3200" spc="-1" strike="noStrike">
+              <a:latin typeface="Arial"/>
             </a:endParaRPr>
           </a:p>
         </p:txBody>
@@ -922,20 +871,8 @@
             <a:normAutofit/>
           </a:bodyPr>
           <a:p>
-            <a:pPr>
-              <a:lnSpc>
-                <a:spcPct val="90000"/>
-              </a:lnSpc>
-              <a:spcBef>
-                <a:spcPts val="1417"/>
-              </a:spcBef>
-              <a:buNone/>
-            </a:pPr>
-            <a:endParaRPr b="0" lang="en-US" sz="2100" spc="-1" strike="noStrike">
-              <a:solidFill>
-                <a:srgbClr val="000000"/>
-              </a:solidFill>
-              <a:latin typeface="Calibri"/>
+            <a:endParaRPr b="0" lang="en-US" sz="3200" spc="-1" strike="noStrike">
+              <a:latin typeface="Arial"/>
             </a:endParaRPr>
           </a:p>
         </p:txBody>
@@ -968,20 +905,8 @@
             <a:normAutofit/>
           </a:bodyPr>
           <a:p>
-            <a:pPr>
-              <a:lnSpc>
-                <a:spcPct val="90000"/>
-              </a:lnSpc>
-              <a:spcBef>
-                <a:spcPts val="1417"/>
-              </a:spcBef>
-              <a:buNone/>
-            </a:pPr>
-            <a:endParaRPr b="0" lang="en-US" sz="2100" spc="-1" strike="noStrike">
-              <a:solidFill>
-                <a:srgbClr val="000000"/>
-              </a:solidFill>
-              <a:latin typeface="Calibri"/>
+            <a:endParaRPr b="0" lang="en-US" sz="3200" spc="-1" strike="noStrike">
+              <a:latin typeface="Arial"/>
             </a:endParaRPr>
           </a:p>
         </p:txBody>
@@ -993,7 +918,7 @@
             <a:spLocks noGrp="1"/>
           </p:cNvSpPr>
           <p:nvPr>
-            <p:ph type="ftr" idx="2"/>
+            <p:ph type="ftr" idx="1"/>
           </p:nvPr>
         </p:nvSpPr>
         <p:spPr/>
@@ -1013,14 +938,14 @@
             <a:spLocks noGrp="1"/>
           </p:cNvSpPr>
           <p:nvPr>
-            <p:ph type="sldNum" idx="3"/>
+            <p:ph type="sldNum" idx="2"/>
           </p:nvPr>
         </p:nvSpPr>
         <p:spPr/>
         <p:txBody>
           <a:bodyPr/>
           <a:p>
-            <a:fld id="{C2B93E2C-2861-46F5-9ADB-751947F0F4B0}" type="slidenum">
+            <a:fld id="{80345374-49A7-44CD-9F0A-22C9CD29A3D3}" type="slidenum">
               <a:t>&lt;#&gt;</a:t>
             </a:fld>
           </a:p>
@@ -1033,7 +958,7 @@
             <a:spLocks noGrp="1"/>
           </p:cNvSpPr>
           <p:nvPr>
-            <p:ph type="dt" idx="1"/>
+            <p:ph type="dt" idx="3"/>
           </p:nvPr>
         </p:nvSpPr>
         <p:spPr/>
@@ -1041,7 +966,7 @@
           <a:bodyPr/>
           <a:p>
             <a:r>
-              <a:rPr lang="ru-RU"/>
+              <a:rPr lang="en-US"/>
               <a:t/>
             </a:r>
           </a:p>
@@ -1082,7 +1007,7 @@
         <p:spPr>
           <a:xfrm>
             <a:off x="1143000" y="841680"/>
-            <a:ext cx="6857640" cy="1790280"/>
+            <a:ext cx="6857280" cy="1789920"/>
           </a:xfrm>
           <a:prstGeom prst="rect">
             <a:avLst/>
@@ -1097,11 +1022,11 @@
             <a:noAutofit/>
           </a:bodyPr>
           <a:p>
-            <a:endParaRPr b="0" lang="en-US" sz="1800" spc="-1" strike="noStrike">
-              <a:solidFill>
-                <a:srgbClr val="000000"/>
-              </a:solidFill>
-              <a:latin typeface="Calibri"/>
+            <a:pPr algn="ctr">
+              <a:buNone/>
+            </a:pPr>
+            <a:endParaRPr b="0" lang="en-US" sz="4400" spc="-1" strike="noStrike">
+              <a:latin typeface="Arial"/>
             </a:endParaRPr>
           </a:p>
         </p:txBody>
@@ -1134,20 +1059,8 @@
             <a:normAutofit/>
           </a:bodyPr>
           <a:p>
-            <a:pPr>
-              <a:lnSpc>
-                <a:spcPct val="90000"/>
-              </a:lnSpc>
-              <a:spcBef>
-                <a:spcPts val="1417"/>
-              </a:spcBef>
-              <a:buNone/>
-            </a:pPr>
-            <a:endParaRPr b="0" lang="en-US" sz="2100" spc="-1" strike="noStrike">
-              <a:solidFill>
-                <a:srgbClr val="000000"/>
-              </a:solidFill>
-              <a:latin typeface="Calibri"/>
+            <a:endParaRPr b="0" lang="en-US" sz="3200" spc="-1" strike="noStrike">
+              <a:latin typeface="Arial"/>
             </a:endParaRPr>
           </a:p>
         </p:txBody>
@@ -1180,20 +1093,8 @@
             <a:normAutofit/>
           </a:bodyPr>
           <a:p>
-            <a:pPr>
-              <a:lnSpc>
-                <a:spcPct val="90000"/>
-              </a:lnSpc>
-              <a:spcBef>
-                <a:spcPts val="1417"/>
-              </a:spcBef>
-              <a:buNone/>
-            </a:pPr>
-            <a:endParaRPr b="0" lang="en-US" sz="2100" spc="-1" strike="noStrike">
-              <a:solidFill>
-                <a:srgbClr val="000000"/>
-              </a:solidFill>
-              <a:latin typeface="Calibri"/>
+            <a:endParaRPr b="0" lang="en-US" sz="3200" spc="-1" strike="noStrike">
+              <a:latin typeface="Arial"/>
             </a:endParaRPr>
           </a:p>
         </p:txBody>
@@ -1226,20 +1127,8 @@
             <a:normAutofit/>
           </a:bodyPr>
           <a:p>
-            <a:pPr>
-              <a:lnSpc>
-                <a:spcPct val="90000"/>
-              </a:lnSpc>
-              <a:spcBef>
-                <a:spcPts val="1417"/>
-              </a:spcBef>
-              <a:buNone/>
-            </a:pPr>
-            <a:endParaRPr b="0" lang="en-US" sz="2100" spc="-1" strike="noStrike">
-              <a:solidFill>
-                <a:srgbClr val="000000"/>
-              </a:solidFill>
-              <a:latin typeface="Calibri"/>
+            <a:endParaRPr b="0" lang="en-US" sz="3200" spc="-1" strike="noStrike">
+              <a:latin typeface="Arial"/>
             </a:endParaRPr>
           </a:p>
         </p:txBody>
@@ -1272,20 +1161,8 @@
             <a:normAutofit/>
           </a:bodyPr>
           <a:p>
-            <a:pPr>
-              <a:lnSpc>
-                <a:spcPct val="90000"/>
-              </a:lnSpc>
-              <a:spcBef>
-                <a:spcPts val="1417"/>
-              </a:spcBef>
-              <a:buNone/>
-            </a:pPr>
-            <a:endParaRPr b="0" lang="en-US" sz="2100" spc="-1" strike="noStrike">
-              <a:solidFill>
-                <a:srgbClr val="000000"/>
-              </a:solidFill>
-              <a:latin typeface="Calibri"/>
+            <a:endParaRPr b="0" lang="en-US" sz="3200" spc="-1" strike="noStrike">
+              <a:latin typeface="Arial"/>
             </a:endParaRPr>
           </a:p>
         </p:txBody>
@@ -1318,20 +1195,8 @@
             <a:normAutofit/>
           </a:bodyPr>
           <a:p>
-            <a:pPr>
-              <a:lnSpc>
-                <a:spcPct val="90000"/>
-              </a:lnSpc>
-              <a:spcBef>
-                <a:spcPts val="1417"/>
-              </a:spcBef>
-              <a:buNone/>
-            </a:pPr>
-            <a:endParaRPr b="0" lang="en-US" sz="2100" spc="-1" strike="noStrike">
-              <a:solidFill>
-                <a:srgbClr val="000000"/>
-              </a:solidFill>
-              <a:latin typeface="Calibri"/>
+            <a:endParaRPr b="0" lang="en-US" sz="3200" spc="-1" strike="noStrike">
+              <a:latin typeface="Arial"/>
             </a:endParaRPr>
           </a:p>
         </p:txBody>
@@ -1364,20 +1229,8 @@
             <a:normAutofit/>
           </a:bodyPr>
           <a:p>
-            <a:pPr>
-              <a:lnSpc>
-                <a:spcPct val="90000"/>
-              </a:lnSpc>
-              <a:spcBef>
-                <a:spcPts val="1417"/>
-              </a:spcBef>
-              <a:buNone/>
-            </a:pPr>
-            <a:endParaRPr b="0" lang="en-US" sz="2100" spc="-1" strike="noStrike">
-              <a:solidFill>
-                <a:srgbClr val="000000"/>
-              </a:solidFill>
-              <a:latin typeface="Calibri"/>
+            <a:endParaRPr b="0" lang="en-US" sz="3200" spc="-1" strike="noStrike">
+              <a:latin typeface="Arial"/>
             </a:endParaRPr>
           </a:p>
         </p:txBody>
@@ -1389,7 +1242,7 @@
             <a:spLocks noGrp="1"/>
           </p:cNvSpPr>
           <p:nvPr>
-            <p:ph type="ftr" idx="2"/>
+            <p:ph type="ftr" idx="1"/>
           </p:nvPr>
         </p:nvSpPr>
         <p:spPr/>
@@ -1409,14 +1262,14 @@
             <a:spLocks noGrp="1"/>
           </p:cNvSpPr>
           <p:nvPr>
-            <p:ph type="sldNum" idx="3"/>
+            <p:ph type="sldNum" idx="2"/>
           </p:nvPr>
         </p:nvSpPr>
         <p:spPr/>
         <p:txBody>
           <a:bodyPr/>
           <a:p>
-            <a:fld id="{A8B6E622-C263-48F9-988E-9E456C281170}" type="slidenum">
+            <a:fld id="{4A3F1021-B2DD-4A4B-A9E0-314927F06507}" type="slidenum">
               <a:t>&lt;#&gt;</a:t>
             </a:fld>
           </a:p>
@@ -1429,7 +1282,7 @@
             <a:spLocks noGrp="1"/>
           </p:cNvSpPr>
           <p:nvPr>
-            <p:ph type="dt" idx="1"/>
+            <p:ph type="dt" idx="3"/>
           </p:nvPr>
         </p:nvSpPr>
         <p:spPr/>
@@ -1437,7 +1290,7 @@
           <a:bodyPr/>
           <a:p>
             <a:r>
-              <a:rPr lang="ru-RU"/>
+              <a:rPr lang="en-US"/>
               <a:t/>
             </a:r>
           </a:p>
@@ -1478,44 +1331,7 @@
         <p:spPr>
           <a:xfrm>
             <a:off x="1143000" y="841680"/>
-            <a:ext cx="6857640" cy="1790280"/>
-          </a:xfrm>
-          <a:prstGeom prst="rect">
-            <a:avLst/>
-          </a:prstGeom>
-          <a:noFill/>
-          <a:ln w="0">
-            <a:noFill/>
-          </a:ln>
-        </p:spPr>
-        <p:txBody>
-          <a:bodyPr lIns="0" rIns="0" tIns="0" bIns="0" anchor="ctr">
-            <a:noAutofit/>
-          </a:bodyPr>
-          <a:p>
-            <a:endParaRPr b="0" lang="en-US" sz="1800" spc="-1" strike="noStrike">
-              <a:solidFill>
-                <a:srgbClr val="000000"/>
-              </a:solidFill>
-              <a:latin typeface="Calibri"/>
-            </a:endParaRPr>
-          </a:p>
-        </p:txBody>
-      </p:sp>
-      <p:sp>
-        <p:nvSpPr>
-          <p:cNvPr id="6" name="PlaceHolder 2"/>
-          <p:cNvSpPr>
-            <a:spLocks noGrp="1"/>
-          </p:cNvSpPr>
-          <p:nvPr>
-            <p:ph type="subTitle"/>
-          </p:nvPr>
-        </p:nvSpPr>
-        <p:spPr>
-          <a:xfrm>
-            <a:off x="457200" y="1203480"/>
-            <a:ext cx="8229240" cy="2982960"/>
+            <a:ext cx="6857280" cy="1789920"/>
           </a:xfrm>
           <a:prstGeom prst="rect">
             <a:avLst/>
@@ -1533,7 +1349,44 @@
             <a:pPr algn="ctr">
               <a:buNone/>
             </a:pPr>
-            <a:endParaRPr b="0" lang="ru-RU" sz="3200" spc="-1" strike="noStrike">
+            <a:endParaRPr b="0" lang="en-US" sz="4400" spc="-1" strike="noStrike">
+              <a:latin typeface="Arial"/>
+            </a:endParaRPr>
+          </a:p>
+        </p:txBody>
+      </p:sp>
+      <p:sp>
+        <p:nvSpPr>
+          <p:cNvPr id="6" name="PlaceHolder 2"/>
+          <p:cNvSpPr>
+            <a:spLocks noGrp="1"/>
+          </p:cNvSpPr>
+          <p:nvPr>
+            <p:ph type="subTitle"/>
+          </p:nvPr>
+        </p:nvSpPr>
+        <p:spPr>
+          <a:xfrm>
+            <a:off x="457200" y="1203480"/>
+            <a:ext cx="8229240" cy="2982960"/>
+          </a:xfrm>
+          <a:prstGeom prst="rect">
+            <a:avLst/>
+          </a:prstGeom>
+          <a:noFill/>
+          <a:ln w="0">
+            <a:noFill/>
+          </a:ln>
+        </p:spPr>
+        <p:txBody>
+          <a:bodyPr lIns="0" rIns="0" tIns="0" bIns="0" anchor="ctr">
+            <a:noAutofit/>
+          </a:bodyPr>
+          <a:p>
+            <a:pPr algn="ctr">
+              <a:buNone/>
+            </a:pPr>
+            <a:endParaRPr b="0" lang="en-US" sz="3200" spc="-1" strike="noStrike">
               <a:latin typeface="Arial"/>
             </a:endParaRPr>
           </a:p>
@@ -1546,7 +1399,7 @@
             <a:spLocks noGrp="1"/>
           </p:cNvSpPr>
           <p:nvPr>
-            <p:ph type="ftr" idx="2"/>
+            <p:ph type="ftr" idx="1"/>
           </p:nvPr>
         </p:nvSpPr>
         <p:spPr/>
@@ -1566,14 +1419,14 @@
             <a:spLocks noGrp="1"/>
           </p:cNvSpPr>
           <p:nvPr>
-            <p:ph type="sldNum" idx="3"/>
+            <p:ph type="sldNum" idx="2"/>
           </p:nvPr>
         </p:nvSpPr>
         <p:spPr/>
         <p:txBody>
           <a:bodyPr/>
           <a:p>
-            <a:fld id="{7ACCD087-0B67-4057-BF93-3E93C559DA25}" type="slidenum">
+            <a:fld id="{D3D797F9-4A9D-46A1-B09E-683CB4341D0F}" type="slidenum">
               <a:t>&lt;#&gt;</a:t>
             </a:fld>
           </a:p>
@@ -1586,7 +1439,7 @@
             <a:spLocks noGrp="1"/>
           </p:cNvSpPr>
           <p:nvPr>
-            <p:ph type="dt" idx="1"/>
+            <p:ph type="dt" idx="3"/>
           </p:nvPr>
         </p:nvSpPr>
         <p:spPr/>
@@ -1594,7 +1447,7 @@
           <a:bodyPr/>
           <a:p>
             <a:r>
-              <a:rPr lang="ru-RU"/>
+              <a:rPr lang="en-US"/>
               <a:t/>
             </a:r>
           </a:p>
@@ -1635,7 +1488,7 @@
         <p:spPr>
           <a:xfrm>
             <a:off x="1143000" y="841680"/>
-            <a:ext cx="6857640" cy="1790280"/>
+            <a:ext cx="6857280" cy="1789920"/>
           </a:xfrm>
           <a:prstGeom prst="rect">
             <a:avLst/>
@@ -1650,11 +1503,11 @@
             <a:noAutofit/>
           </a:bodyPr>
           <a:p>
-            <a:endParaRPr b="0" lang="en-US" sz="1800" spc="-1" strike="noStrike">
-              <a:solidFill>
-                <a:srgbClr val="000000"/>
-              </a:solidFill>
-              <a:latin typeface="Calibri"/>
+            <a:pPr algn="ctr">
+              <a:buNone/>
+            </a:pPr>
+            <a:endParaRPr b="0" lang="en-US" sz="4400" spc="-1" strike="noStrike">
+              <a:latin typeface="Arial"/>
             </a:endParaRPr>
           </a:p>
         </p:txBody>
@@ -1687,20 +1540,8 @@
             <a:normAutofit/>
           </a:bodyPr>
           <a:p>
-            <a:pPr>
-              <a:lnSpc>
-                <a:spcPct val="90000"/>
-              </a:lnSpc>
-              <a:spcBef>
-                <a:spcPts val="1417"/>
-              </a:spcBef>
-              <a:buNone/>
-            </a:pPr>
-            <a:endParaRPr b="0" lang="en-US" sz="2100" spc="-1" strike="noStrike">
-              <a:solidFill>
-                <a:srgbClr val="000000"/>
-              </a:solidFill>
-              <a:latin typeface="Calibri"/>
+            <a:endParaRPr b="0" lang="en-US" sz="3200" spc="-1" strike="noStrike">
+              <a:latin typeface="Arial"/>
             </a:endParaRPr>
           </a:p>
         </p:txBody>
@@ -1712,7 +1553,7 @@
             <a:spLocks noGrp="1"/>
           </p:cNvSpPr>
           <p:nvPr>
-            <p:ph type="ftr" idx="2"/>
+            <p:ph type="ftr" idx="1"/>
           </p:nvPr>
         </p:nvSpPr>
         <p:spPr/>
@@ -1732,14 +1573,14 @@
             <a:spLocks noGrp="1"/>
           </p:cNvSpPr>
           <p:nvPr>
-            <p:ph type="sldNum" idx="3"/>
+            <p:ph type="sldNum" idx="2"/>
           </p:nvPr>
         </p:nvSpPr>
         <p:spPr/>
         <p:txBody>
           <a:bodyPr/>
           <a:p>
-            <a:fld id="{08A24383-05E6-4495-BFB7-D3473C827464}" type="slidenum">
+            <a:fld id="{1A8D737F-6FC4-41C5-91C0-A9307DE9E500}" type="slidenum">
               <a:t>&lt;#&gt;</a:t>
             </a:fld>
           </a:p>
@@ -1752,7 +1593,7 @@
             <a:spLocks noGrp="1"/>
           </p:cNvSpPr>
           <p:nvPr>
-            <p:ph type="dt" idx="1"/>
+            <p:ph type="dt" idx="3"/>
           </p:nvPr>
         </p:nvSpPr>
         <p:spPr/>
@@ -1760,7 +1601,7 @@
           <a:bodyPr/>
           <a:p>
             <a:r>
-              <a:rPr lang="ru-RU"/>
+              <a:rPr lang="en-US"/>
               <a:t/>
             </a:r>
           </a:p>
@@ -1801,7 +1642,7 @@
         <p:spPr>
           <a:xfrm>
             <a:off x="1143000" y="841680"/>
-            <a:ext cx="6857640" cy="1790280"/>
+            <a:ext cx="6857280" cy="1789920"/>
           </a:xfrm>
           <a:prstGeom prst="rect">
             <a:avLst/>
@@ -1816,11 +1657,11 @@
             <a:noAutofit/>
           </a:bodyPr>
           <a:p>
-            <a:endParaRPr b="0" lang="en-US" sz="1800" spc="-1" strike="noStrike">
-              <a:solidFill>
-                <a:srgbClr val="000000"/>
-              </a:solidFill>
-              <a:latin typeface="Calibri"/>
+            <a:pPr algn="ctr">
+              <a:buNone/>
+            </a:pPr>
+            <a:endParaRPr b="0" lang="en-US" sz="4400" spc="-1" strike="noStrike">
+              <a:latin typeface="Arial"/>
             </a:endParaRPr>
           </a:p>
         </p:txBody>
@@ -1853,20 +1694,8 @@
             <a:normAutofit/>
           </a:bodyPr>
           <a:p>
-            <a:pPr>
-              <a:lnSpc>
-                <a:spcPct val="90000"/>
-              </a:lnSpc>
-              <a:spcBef>
-                <a:spcPts val="1417"/>
-              </a:spcBef>
-              <a:buNone/>
-            </a:pPr>
-            <a:endParaRPr b="0" lang="en-US" sz="2100" spc="-1" strike="noStrike">
-              <a:solidFill>
-                <a:srgbClr val="000000"/>
-              </a:solidFill>
-              <a:latin typeface="Calibri"/>
+            <a:endParaRPr b="0" lang="en-US" sz="3200" spc="-1" strike="noStrike">
+              <a:latin typeface="Arial"/>
             </a:endParaRPr>
           </a:p>
         </p:txBody>
@@ -1899,20 +1728,8 @@
             <a:normAutofit/>
           </a:bodyPr>
           <a:p>
-            <a:pPr>
-              <a:lnSpc>
-                <a:spcPct val="90000"/>
-              </a:lnSpc>
-              <a:spcBef>
-                <a:spcPts val="1417"/>
-              </a:spcBef>
-              <a:buNone/>
-            </a:pPr>
-            <a:endParaRPr b="0" lang="en-US" sz="2100" spc="-1" strike="noStrike">
-              <a:solidFill>
-                <a:srgbClr val="000000"/>
-              </a:solidFill>
-              <a:latin typeface="Calibri"/>
+            <a:endParaRPr b="0" lang="en-US" sz="3200" spc="-1" strike="noStrike">
+              <a:latin typeface="Arial"/>
             </a:endParaRPr>
           </a:p>
         </p:txBody>
@@ -1924,7 +1741,7 @@
             <a:spLocks noGrp="1"/>
           </p:cNvSpPr>
           <p:nvPr>
-            <p:ph type="ftr" idx="2"/>
+            <p:ph type="ftr" idx="1"/>
           </p:nvPr>
         </p:nvSpPr>
         <p:spPr/>
@@ -1944,14 +1761,14 @@
             <a:spLocks noGrp="1"/>
           </p:cNvSpPr>
           <p:nvPr>
-            <p:ph type="sldNum" idx="3"/>
+            <p:ph type="sldNum" idx="2"/>
           </p:nvPr>
         </p:nvSpPr>
         <p:spPr/>
         <p:txBody>
           <a:bodyPr/>
           <a:p>
-            <a:fld id="{4FF12269-9BC8-43DF-B288-6CD28E29D65B}" type="slidenum">
+            <a:fld id="{87219ACF-2AA8-4147-8FAB-191C736B9856}" type="slidenum">
               <a:t>&lt;#&gt;</a:t>
             </a:fld>
           </a:p>
@@ -1964,7 +1781,7 @@
             <a:spLocks noGrp="1"/>
           </p:cNvSpPr>
           <p:nvPr>
-            <p:ph type="dt" idx="1"/>
+            <p:ph type="dt" idx="3"/>
           </p:nvPr>
         </p:nvSpPr>
         <p:spPr/>
@@ -1972,7 +1789,7 @@
           <a:bodyPr/>
           <a:p>
             <a:r>
-              <a:rPr lang="ru-RU"/>
+              <a:rPr lang="en-US"/>
               <a:t/>
             </a:r>
           </a:p>
@@ -2013,7 +1830,7 @@
         <p:spPr>
           <a:xfrm>
             <a:off x="1143000" y="841680"/>
-            <a:ext cx="6857640" cy="1790280"/>
+            <a:ext cx="6857280" cy="1789920"/>
           </a:xfrm>
           <a:prstGeom prst="rect">
             <a:avLst/>
@@ -2028,11 +1845,11 @@
             <a:noAutofit/>
           </a:bodyPr>
           <a:p>
-            <a:endParaRPr b="0" lang="en-US" sz="1800" spc="-1" strike="noStrike">
-              <a:solidFill>
-                <a:srgbClr val="000000"/>
-              </a:solidFill>
-              <a:latin typeface="Calibri"/>
+            <a:pPr algn="ctr">
+              <a:buNone/>
+            </a:pPr>
+            <a:endParaRPr b="0" lang="en-US" sz="4400" spc="-1" strike="noStrike">
+              <a:latin typeface="Arial"/>
             </a:endParaRPr>
           </a:p>
         </p:txBody>
@@ -2044,7 +1861,7 @@
             <a:spLocks noGrp="1"/>
           </p:cNvSpPr>
           <p:nvPr>
-            <p:ph type="ftr" idx="2"/>
+            <p:ph type="ftr" idx="1"/>
           </p:nvPr>
         </p:nvSpPr>
         <p:spPr/>
@@ -2064,14 +1881,14 @@
             <a:spLocks noGrp="1"/>
           </p:cNvSpPr>
           <p:nvPr>
-            <p:ph type="sldNum" idx="3"/>
+            <p:ph type="sldNum" idx="2"/>
           </p:nvPr>
         </p:nvSpPr>
         <p:spPr/>
         <p:txBody>
           <a:bodyPr/>
           <a:p>
-            <a:fld id="{3E04D62B-1A14-4CE0-BD1E-2B81FA885308}" type="slidenum">
+            <a:fld id="{267E05DD-6D49-4652-A93A-3633A74D21A3}" type="slidenum">
               <a:t>&lt;#&gt;</a:t>
             </a:fld>
           </a:p>
@@ -2084,7 +1901,7 @@
             <a:spLocks noGrp="1"/>
           </p:cNvSpPr>
           <p:nvPr>
-            <p:ph type="dt" idx="1"/>
+            <p:ph type="dt" idx="3"/>
           </p:nvPr>
         </p:nvSpPr>
         <p:spPr/>
@@ -2092,7 +1909,7 @@
           <a:bodyPr/>
           <a:p>
             <a:r>
-              <a:rPr lang="ru-RU"/>
+              <a:rPr lang="en-US"/>
               <a:t/>
             </a:r>
           </a:p>
@@ -2133,7 +1950,7 @@
         <p:spPr>
           <a:xfrm>
             <a:off x="1143000" y="841680"/>
-            <a:ext cx="6857640" cy="8299800"/>
+            <a:ext cx="6857280" cy="8298360"/>
           </a:xfrm>
           <a:prstGeom prst="rect">
             <a:avLst/>
@@ -2151,7 +1968,7 @@
             <a:pPr algn="ctr">
               <a:buNone/>
             </a:pPr>
-            <a:endParaRPr b="0" lang="ru-RU" sz="3200" spc="-1" strike="noStrike">
+            <a:endParaRPr b="0" lang="en-US" sz="3200" spc="-1" strike="noStrike">
               <a:latin typeface="Arial"/>
             </a:endParaRPr>
           </a:p>
@@ -2164,7 +1981,7 @@
             <a:spLocks noGrp="1"/>
           </p:cNvSpPr>
           <p:nvPr>
-            <p:ph type="ftr" idx="2"/>
+            <p:ph type="ftr" idx="1"/>
           </p:nvPr>
         </p:nvSpPr>
         <p:spPr/>
@@ -2184,14 +2001,14 @@
             <a:spLocks noGrp="1"/>
           </p:cNvSpPr>
           <p:nvPr>
-            <p:ph type="sldNum" idx="3"/>
+            <p:ph type="sldNum" idx="2"/>
           </p:nvPr>
         </p:nvSpPr>
         <p:spPr/>
         <p:txBody>
           <a:bodyPr/>
           <a:p>
-            <a:fld id="{B7A1476C-66B1-41EC-9151-72BEA7F3DFB7}" type="slidenum">
+            <a:fld id="{C4A453FA-F428-480E-9026-9B933DED45E5}" type="slidenum">
               <a:t>&lt;#&gt;</a:t>
             </a:fld>
           </a:p>
@@ -2204,7 +2021,7 @@
             <a:spLocks noGrp="1"/>
           </p:cNvSpPr>
           <p:nvPr>
-            <p:ph type="dt" idx="1"/>
+            <p:ph type="dt" idx="3"/>
           </p:nvPr>
         </p:nvSpPr>
         <p:spPr/>
@@ -2212,7 +2029,7 @@
           <a:bodyPr/>
           <a:p>
             <a:r>
-              <a:rPr lang="ru-RU"/>
+              <a:rPr lang="en-US"/>
               <a:t/>
             </a:r>
           </a:p>
@@ -2253,7 +2070,7 @@
         <p:spPr>
           <a:xfrm>
             <a:off x="1143000" y="841680"/>
-            <a:ext cx="6857640" cy="1790280"/>
+            <a:ext cx="6857280" cy="1789920"/>
           </a:xfrm>
           <a:prstGeom prst="rect">
             <a:avLst/>
@@ -2268,11 +2085,11 @@
             <a:noAutofit/>
           </a:bodyPr>
           <a:p>
-            <a:endParaRPr b="0" lang="en-US" sz="1800" spc="-1" strike="noStrike">
-              <a:solidFill>
-                <a:srgbClr val="000000"/>
-              </a:solidFill>
-              <a:latin typeface="Calibri"/>
+            <a:pPr algn="ctr">
+              <a:buNone/>
+            </a:pPr>
+            <a:endParaRPr b="0" lang="en-US" sz="4400" spc="-1" strike="noStrike">
+              <a:latin typeface="Arial"/>
             </a:endParaRPr>
           </a:p>
         </p:txBody>
@@ -2305,20 +2122,8 @@
             <a:normAutofit/>
           </a:bodyPr>
           <a:p>
-            <a:pPr>
-              <a:lnSpc>
-                <a:spcPct val="90000"/>
-              </a:lnSpc>
-              <a:spcBef>
-                <a:spcPts val="1417"/>
-              </a:spcBef>
-              <a:buNone/>
-            </a:pPr>
-            <a:endParaRPr b="0" lang="en-US" sz="2100" spc="-1" strike="noStrike">
-              <a:solidFill>
-                <a:srgbClr val="000000"/>
-              </a:solidFill>
-              <a:latin typeface="Calibri"/>
+            <a:endParaRPr b="0" lang="en-US" sz="3200" spc="-1" strike="noStrike">
+              <a:latin typeface="Arial"/>
             </a:endParaRPr>
           </a:p>
         </p:txBody>
@@ -2351,20 +2156,8 @@
             <a:normAutofit/>
           </a:bodyPr>
           <a:p>
-            <a:pPr>
-              <a:lnSpc>
-                <a:spcPct val="90000"/>
-              </a:lnSpc>
-              <a:spcBef>
-                <a:spcPts val="1417"/>
-              </a:spcBef>
-              <a:buNone/>
-            </a:pPr>
-            <a:endParaRPr b="0" lang="en-US" sz="2100" spc="-1" strike="noStrike">
-              <a:solidFill>
-                <a:srgbClr val="000000"/>
-              </a:solidFill>
-              <a:latin typeface="Calibri"/>
+            <a:endParaRPr b="0" lang="en-US" sz="3200" spc="-1" strike="noStrike">
+              <a:latin typeface="Arial"/>
             </a:endParaRPr>
           </a:p>
         </p:txBody>
@@ -2397,20 +2190,8 @@
             <a:normAutofit/>
           </a:bodyPr>
           <a:p>
-            <a:pPr>
-              <a:lnSpc>
-                <a:spcPct val="90000"/>
-              </a:lnSpc>
-              <a:spcBef>
-                <a:spcPts val="1417"/>
-              </a:spcBef>
-              <a:buNone/>
-            </a:pPr>
-            <a:endParaRPr b="0" lang="en-US" sz="2100" spc="-1" strike="noStrike">
-              <a:solidFill>
-                <a:srgbClr val="000000"/>
-              </a:solidFill>
-              <a:latin typeface="Calibri"/>
+            <a:endParaRPr b="0" lang="en-US" sz="3200" spc="-1" strike="noStrike">
+              <a:latin typeface="Arial"/>
             </a:endParaRPr>
           </a:p>
         </p:txBody>
@@ -2422,7 +2203,7 @@
             <a:spLocks noGrp="1"/>
           </p:cNvSpPr>
           <p:nvPr>
-            <p:ph type="ftr" idx="2"/>
+            <p:ph type="ftr" idx="1"/>
           </p:nvPr>
         </p:nvSpPr>
         <p:spPr/>
@@ -2442,14 +2223,14 @@
             <a:spLocks noGrp="1"/>
           </p:cNvSpPr>
           <p:nvPr>
-            <p:ph type="sldNum" idx="3"/>
+            <p:ph type="sldNum" idx="2"/>
           </p:nvPr>
         </p:nvSpPr>
         <p:spPr/>
         <p:txBody>
           <a:bodyPr/>
           <a:p>
-            <a:fld id="{6AC283DD-F681-4D07-93D6-C113048052D6}" type="slidenum">
+            <a:fld id="{0B3C0790-9168-4452-9E61-AEACCFFCBB03}" type="slidenum">
               <a:t>&lt;#&gt;</a:t>
             </a:fld>
           </a:p>
@@ -2462,7 +2243,7 @@
             <a:spLocks noGrp="1"/>
           </p:cNvSpPr>
           <p:nvPr>
-            <p:ph type="dt" idx="1"/>
+            <p:ph type="dt" idx="3"/>
           </p:nvPr>
         </p:nvSpPr>
         <p:spPr/>
@@ -2470,7 +2251,7 @@
           <a:bodyPr/>
           <a:p>
             <a:r>
-              <a:rPr lang="ru-RU"/>
+              <a:rPr lang="en-US"/>
               <a:t/>
             </a:r>
           </a:p>
@@ -2511,7 +2292,7 @@
         <p:spPr>
           <a:xfrm>
             <a:off x="1143000" y="841680"/>
-            <a:ext cx="6857640" cy="1790280"/>
+            <a:ext cx="6857280" cy="1789920"/>
           </a:xfrm>
           <a:prstGeom prst="rect">
             <a:avLst/>
@@ -2526,11 +2307,11 @@
             <a:noAutofit/>
           </a:bodyPr>
           <a:p>
-            <a:endParaRPr b="0" lang="en-US" sz="1800" spc="-1" strike="noStrike">
-              <a:solidFill>
-                <a:srgbClr val="000000"/>
-              </a:solidFill>
-              <a:latin typeface="Calibri"/>
+            <a:pPr algn="ctr">
+              <a:buNone/>
+            </a:pPr>
+            <a:endParaRPr b="0" lang="en-US" sz="4400" spc="-1" strike="noStrike">
+              <a:latin typeface="Arial"/>
             </a:endParaRPr>
           </a:p>
         </p:txBody>
@@ -2563,20 +2344,8 @@
             <a:normAutofit/>
           </a:bodyPr>
           <a:p>
-            <a:pPr>
-              <a:lnSpc>
-                <a:spcPct val="90000"/>
-              </a:lnSpc>
-              <a:spcBef>
-                <a:spcPts val="1417"/>
-              </a:spcBef>
-              <a:buNone/>
-            </a:pPr>
-            <a:endParaRPr b="0" lang="en-US" sz="2100" spc="-1" strike="noStrike">
-              <a:solidFill>
-                <a:srgbClr val="000000"/>
-              </a:solidFill>
-              <a:latin typeface="Calibri"/>
+            <a:endParaRPr b="0" lang="en-US" sz="3200" spc="-1" strike="noStrike">
+              <a:latin typeface="Arial"/>
             </a:endParaRPr>
           </a:p>
         </p:txBody>
@@ -2609,20 +2378,8 @@
             <a:normAutofit/>
           </a:bodyPr>
           <a:p>
-            <a:pPr>
-              <a:lnSpc>
-                <a:spcPct val="90000"/>
-              </a:lnSpc>
-              <a:spcBef>
-                <a:spcPts val="1417"/>
-              </a:spcBef>
-              <a:buNone/>
-            </a:pPr>
-            <a:endParaRPr b="0" lang="en-US" sz="2100" spc="-1" strike="noStrike">
-              <a:solidFill>
-                <a:srgbClr val="000000"/>
-              </a:solidFill>
-              <a:latin typeface="Calibri"/>
+            <a:endParaRPr b="0" lang="en-US" sz="3200" spc="-1" strike="noStrike">
+              <a:latin typeface="Arial"/>
             </a:endParaRPr>
           </a:p>
         </p:txBody>
@@ -2655,20 +2412,8 @@
             <a:normAutofit/>
           </a:bodyPr>
           <a:p>
-            <a:pPr>
-              <a:lnSpc>
-                <a:spcPct val="90000"/>
-              </a:lnSpc>
-              <a:spcBef>
-                <a:spcPts val="1417"/>
-              </a:spcBef>
-              <a:buNone/>
-            </a:pPr>
-            <a:endParaRPr b="0" lang="en-US" sz="2100" spc="-1" strike="noStrike">
-              <a:solidFill>
-                <a:srgbClr val="000000"/>
-              </a:solidFill>
-              <a:latin typeface="Calibri"/>
+            <a:endParaRPr b="0" lang="en-US" sz="3200" spc="-1" strike="noStrike">
+              <a:latin typeface="Arial"/>
             </a:endParaRPr>
           </a:p>
         </p:txBody>
@@ -2680,7 +2425,7 @@
             <a:spLocks noGrp="1"/>
           </p:cNvSpPr>
           <p:nvPr>
-            <p:ph type="ftr" idx="2"/>
+            <p:ph type="ftr" idx="1"/>
           </p:nvPr>
         </p:nvSpPr>
         <p:spPr/>
@@ -2700,14 +2445,14 @@
             <a:spLocks noGrp="1"/>
           </p:cNvSpPr>
           <p:nvPr>
-            <p:ph type="sldNum" idx="3"/>
+            <p:ph type="sldNum" idx="2"/>
           </p:nvPr>
         </p:nvSpPr>
         <p:spPr/>
         <p:txBody>
           <a:bodyPr/>
           <a:p>
-            <a:fld id="{F0274051-EDE5-4B55-929F-9C9FF40087D3}" type="slidenum">
+            <a:fld id="{2D2A5A0A-9A8B-4EED-9B8D-AD8E647876D8}" type="slidenum">
               <a:t>&lt;#&gt;</a:t>
             </a:fld>
           </a:p>
@@ -2720,7 +2465,7 @@
             <a:spLocks noGrp="1"/>
           </p:cNvSpPr>
           <p:nvPr>
-            <p:ph type="dt" idx="1"/>
+            <p:ph type="dt" idx="3"/>
           </p:nvPr>
         </p:nvSpPr>
         <p:spPr/>
@@ -2728,7 +2473,7 @@
           <a:bodyPr/>
           <a:p>
             <a:r>
-              <a:rPr lang="ru-RU"/>
+              <a:rPr lang="en-US"/>
               <a:t/>
             </a:r>
           </a:p>
@@ -2769,7 +2514,7 @@
         <p:spPr>
           <a:xfrm>
             <a:off x="1143000" y="841680"/>
-            <a:ext cx="6857640" cy="1790280"/>
+            <a:ext cx="6857280" cy="1789920"/>
           </a:xfrm>
           <a:prstGeom prst="rect">
             <a:avLst/>
@@ -2784,11 +2529,11 @@
             <a:noAutofit/>
           </a:bodyPr>
           <a:p>
-            <a:endParaRPr b="0" lang="en-US" sz="1800" spc="-1" strike="noStrike">
-              <a:solidFill>
-                <a:srgbClr val="000000"/>
-              </a:solidFill>
-              <a:latin typeface="Calibri"/>
+            <a:pPr algn="ctr">
+              <a:buNone/>
+            </a:pPr>
+            <a:endParaRPr b="0" lang="en-US" sz="4400" spc="-1" strike="noStrike">
+              <a:latin typeface="Arial"/>
             </a:endParaRPr>
           </a:p>
         </p:txBody>
@@ -2821,20 +2566,8 @@
             <a:normAutofit/>
           </a:bodyPr>
           <a:p>
-            <a:pPr>
-              <a:lnSpc>
-                <a:spcPct val="90000"/>
-              </a:lnSpc>
-              <a:spcBef>
-                <a:spcPts val="1417"/>
-              </a:spcBef>
-              <a:buNone/>
-            </a:pPr>
-            <a:endParaRPr b="0" lang="en-US" sz="2100" spc="-1" strike="noStrike">
-              <a:solidFill>
-                <a:srgbClr val="000000"/>
-              </a:solidFill>
-              <a:latin typeface="Calibri"/>
+            <a:endParaRPr b="0" lang="en-US" sz="3200" spc="-1" strike="noStrike">
+              <a:latin typeface="Arial"/>
             </a:endParaRPr>
           </a:p>
         </p:txBody>
@@ -2867,20 +2600,8 @@
             <a:normAutofit/>
           </a:bodyPr>
           <a:p>
-            <a:pPr>
-              <a:lnSpc>
-                <a:spcPct val="90000"/>
-              </a:lnSpc>
-              <a:spcBef>
-                <a:spcPts val="1417"/>
-              </a:spcBef>
-              <a:buNone/>
-            </a:pPr>
-            <a:endParaRPr b="0" lang="en-US" sz="2100" spc="-1" strike="noStrike">
-              <a:solidFill>
-                <a:srgbClr val="000000"/>
-              </a:solidFill>
-              <a:latin typeface="Calibri"/>
+            <a:endParaRPr b="0" lang="en-US" sz="3200" spc="-1" strike="noStrike">
+              <a:latin typeface="Arial"/>
             </a:endParaRPr>
           </a:p>
         </p:txBody>
@@ -2913,20 +2634,8 @@
             <a:normAutofit/>
           </a:bodyPr>
           <a:p>
-            <a:pPr>
-              <a:lnSpc>
-                <a:spcPct val="90000"/>
-              </a:lnSpc>
-              <a:spcBef>
-                <a:spcPts val="1417"/>
-              </a:spcBef>
-              <a:buNone/>
-            </a:pPr>
-            <a:endParaRPr b="0" lang="en-US" sz="2100" spc="-1" strike="noStrike">
-              <a:solidFill>
-                <a:srgbClr val="000000"/>
-              </a:solidFill>
-              <a:latin typeface="Calibri"/>
+            <a:endParaRPr b="0" lang="en-US" sz="3200" spc="-1" strike="noStrike">
+              <a:latin typeface="Arial"/>
             </a:endParaRPr>
           </a:p>
         </p:txBody>
@@ -2938,7 +2647,7 @@
             <a:spLocks noGrp="1"/>
           </p:cNvSpPr>
           <p:nvPr>
-            <p:ph type="ftr" idx="2"/>
+            <p:ph type="ftr" idx="1"/>
           </p:nvPr>
         </p:nvSpPr>
         <p:spPr/>
@@ -2958,14 +2667,14 @@
             <a:spLocks noGrp="1"/>
           </p:cNvSpPr>
           <p:nvPr>
-            <p:ph type="sldNum" idx="3"/>
+            <p:ph type="sldNum" idx="2"/>
           </p:nvPr>
         </p:nvSpPr>
         <p:spPr/>
         <p:txBody>
           <a:bodyPr/>
           <a:p>
-            <a:fld id="{0B309D23-D212-4B3B-A7E3-7E4F1D9CA4C5}" type="slidenum">
+            <a:fld id="{DC7E8319-AAA0-4D9D-94C3-8AA94D9435C5}" type="slidenum">
               <a:t>&lt;#&gt;</a:t>
             </a:fld>
           </a:p>
@@ -2978,7 +2687,7 @@
             <a:spLocks noGrp="1"/>
           </p:cNvSpPr>
           <p:nvPr>
-            <p:ph type="dt" idx="1"/>
+            <p:ph type="dt" idx="3"/>
           </p:nvPr>
         </p:nvSpPr>
         <p:spPr/>
@@ -2986,7 +2695,7 @@
           <a:bodyPr/>
           <a:p>
             <a:r>
-              <a:rPr lang="ru-RU"/>
+              <a:rPr lang="en-US"/>
               <a:t/>
             </a:r>
           </a:p>
@@ -3034,41 +2743,29 @@
         <p:spPr>
           <a:xfrm>
             <a:off x="1143000" y="841680"/>
-            <a:ext cx="6857640" cy="1790280"/>
-          </a:xfrm>
-          <a:prstGeom prst="rect">
-            <a:avLst/>
-          </a:prstGeom>
-          <a:noFill/>
-          <a:ln w="0">
-            <a:noFill/>
-          </a:ln>
-        </p:spPr>
-        <p:txBody>
-          <a:bodyPr anchor="b">
+            <a:ext cx="6857280" cy="1789920"/>
+          </a:xfrm>
+          <a:prstGeom prst="rect">
+            <a:avLst/>
+          </a:prstGeom>
+          <a:noFill/>
+          <a:ln w="0">
+            <a:noFill/>
+          </a:ln>
+        </p:spPr>
+        <p:txBody>
+          <a:bodyPr lIns="0" rIns="0" tIns="0" bIns="0" anchor="ctr">
             <a:noAutofit/>
           </a:bodyPr>
           <a:p>
-            <a:pPr algn="ctr">
-              <a:lnSpc>
-                <a:spcPct val="90000"/>
-              </a:lnSpc>
-              <a:buNone/>
-            </a:pPr>
-            <a:r>
-              <a:rPr b="0" lang="ru-RU" sz="4500" spc="-1" strike="noStrike">
-                <a:solidFill>
-                  <a:srgbClr val="000000"/>
-                </a:solidFill>
-                <a:latin typeface="Calibri Light"/>
-              </a:rPr>
-              <a:t>Образец заголовка</a:t>
-            </a:r>
-            <a:endParaRPr b="0" lang="en-US" sz="4500" spc="-1" strike="noStrike">
-              <a:solidFill>
-                <a:srgbClr val="000000"/>
-              </a:solidFill>
-              <a:latin typeface="Calibri"/>
+            <a:r>
+              <a:rPr b="0" lang="en-US" sz="1800" spc="-1" strike="noStrike">
+                <a:latin typeface="Arial"/>
+              </a:rPr>
+              <a:t>Click to edit the title text format</a:t>
+            </a:r>
+            <a:endParaRPr b="0" lang="en-US" sz="1800" spc="-1" strike="noStrike">
+              <a:latin typeface="Arial"/>
             </a:endParaRPr>
           </a:p>
         </p:txBody>
@@ -3080,91 +2777,31 @@
             <a:spLocks noGrp="1"/>
           </p:cNvSpPr>
           <p:nvPr>
-            <p:ph type="dt" idx="1"/>
-          </p:nvPr>
-        </p:nvSpPr>
-        <p:spPr>
-          <a:xfrm>
-            <a:off x="628560" y="4767120"/>
-            <a:ext cx="2057040" cy="273600"/>
-          </a:xfrm>
-          <a:prstGeom prst="rect">
-            <a:avLst/>
-          </a:prstGeom>
-          <a:noFill/>
-          <a:ln w="0">
-            <a:noFill/>
-          </a:ln>
-        </p:spPr>
-        <p:txBody>
-          <a:bodyPr anchor="ctr">
+            <p:ph type="ftr" idx="1"/>
+          </p:nvPr>
+        </p:nvSpPr>
+        <p:spPr>
+          <a:xfrm>
+            <a:off x="3029040" y="4767120"/>
+            <a:ext cx="3085560" cy="273240"/>
+          </a:xfrm>
+          <a:prstGeom prst="rect">
+            <a:avLst/>
+          </a:prstGeom>
+          <a:noFill/>
+          <a:ln w="0">
+            <a:noFill/>
+          </a:ln>
+        </p:spPr>
+        <p:txBody>
+          <a:bodyPr lIns="90000" rIns="90000" tIns="45000" bIns="45000" anchor="ctr">
             <a:noAutofit/>
           </a:bodyPr>
           <a:lstStyle>
-            <a:lvl1pPr>
+            <a:lvl1pPr algn="ctr">
               <a:lnSpc>
                 <a:spcPct val="100000"/>
               </a:lnSpc>
-              <a:buNone/>
-              <a:defRPr b="0" lang="en-US" sz="900" spc="-1" strike="noStrike">
-                <a:solidFill>
-                  <a:srgbClr val="8b8b8b"/>
-                </a:solidFill>
-                <a:latin typeface="Calibri"/>
-              </a:defRPr>
-            </a:lvl1pPr>
-          </a:lstStyle>
-          <a:p>
-            <a:pPr>
-              <a:lnSpc>
-                <a:spcPct val="100000"/>
-              </a:lnSpc>
-              <a:buNone/>
-            </a:pPr>
-            <a:r>
-              <a:rPr b="0" lang="en-US" sz="900" spc="-1" strike="noStrike">
-                <a:solidFill>
-                  <a:srgbClr val="8b8b8b"/>
-                </a:solidFill>
-                <a:latin typeface="Calibri"/>
-              </a:rPr>
-              <a:t>&lt;дата/время&gt;</a:t>
-            </a:r>
-            <a:endParaRPr b="0" lang="ru-RU" sz="900" spc="-1" strike="noStrike">
-              <a:latin typeface="Times New Roman"/>
-            </a:endParaRPr>
-          </a:p>
-        </p:txBody>
-      </p:sp>
-      <p:sp>
-        <p:nvSpPr>
-          <p:cNvPr id="2" name="PlaceHolder 3"/>
-          <p:cNvSpPr>
-            <a:spLocks noGrp="1"/>
-          </p:cNvSpPr>
-          <p:nvPr>
-            <p:ph type="ftr" idx="2"/>
-          </p:nvPr>
-        </p:nvSpPr>
-        <p:spPr>
-          <a:xfrm>
-            <a:off x="3029040" y="4767120"/>
-            <a:ext cx="3085920" cy="273600"/>
-          </a:xfrm>
-          <a:prstGeom prst="rect">
-            <a:avLst/>
-          </a:prstGeom>
-          <a:noFill/>
-          <a:ln w="0">
-            <a:noFill/>
-          </a:ln>
-        </p:spPr>
-        <p:txBody>
-          <a:bodyPr anchor="ctr">
-            <a:noAutofit/>
-          </a:bodyPr>
-          <a:lstStyle>
-            <a:lvl1pPr algn="ctr">
               <a:buNone/>
               <a:defRPr b="0" lang="ru-RU" sz="1400" spc="-1" strike="noStrike">
                 <a:latin typeface="Times New Roman"/>
@@ -3173,15 +2810,18 @@
           </a:lstStyle>
           <a:p>
             <a:pPr algn="ctr">
+              <a:lnSpc>
+                <a:spcPct val="100000"/>
+              </a:lnSpc>
               <a:buNone/>
             </a:pPr>
             <a:r>
               <a:rPr b="0" lang="ru-RU" sz="1400" spc="-1" strike="noStrike">
                 <a:latin typeface="Times New Roman"/>
               </a:rPr>
-              <a:t>&lt;нижний колонтитул&gt;</a:t>
-            </a:r>
-            <a:endParaRPr b="0" lang="ru-RU" sz="1400" spc="-1" strike="noStrike">
+              <a:t>&lt;footer&gt;</a:t>
+            </a:r>
+            <a:endParaRPr b="0" lang="en-US" sz="1400" spc="-1" strike="noStrike">
               <a:latin typeface="Times New Roman"/>
             </a:endParaRPr>
           </a:p>
@@ -3189,29 +2829,29 @@
       </p:sp>
       <p:sp>
         <p:nvSpPr>
-          <p:cNvPr id="3" name="PlaceHolder 4"/>
-          <p:cNvSpPr>
-            <a:spLocks noGrp="1"/>
-          </p:cNvSpPr>
-          <p:nvPr>
-            <p:ph type="sldNum" idx="3"/>
+          <p:cNvPr id="2" name="PlaceHolder 3"/>
+          <p:cNvSpPr>
+            <a:spLocks noGrp="1"/>
+          </p:cNvSpPr>
+          <p:nvPr>
+            <p:ph type="sldNum" idx="2"/>
           </p:nvPr>
         </p:nvSpPr>
         <p:spPr>
           <a:xfrm>
             <a:off x="6458040" y="4767120"/>
-            <a:ext cx="2057040" cy="273600"/>
-          </a:xfrm>
-          <a:prstGeom prst="rect">
-            <a:avLst/>
-          </a:prstGeom>
-          <a:noFill/>
-          <a:ln w="0">
-            <a:noFill/>
-          </a:ln>
-        </p:spPr>
-        <p:txBody>
-          <a:bodyPr anchor="ctr">
+            <a:ext cx="2056680" cy="273240"/>
+          </a:xfrm>
+          <a:prstGeom prst="rect">
+            <a:avLst/>
+          </a:prstGeom>
+          <a:noFill/>
+          <a:ln w="0">
+            <a:noFill/>
+          </a:ln>
+        </p:spPr>
+        <p:txBody>
+          <a:bodyPr lIns="90000" rIns="90000" tIns="45000" bIns="45000" anchor="ctr">
             <a:noAutofit/>
           </a:bodyPr>
           <a:lstStyle>
@@ -3235,16 +2875,63 @@
               </a:lnSpc>
               <a:buNone/>
             </a:pPr>
-            <a:fld id="{2967F5A1-2ACE-4B8A-A15F-F8179387CA93}" type="slidenum">
+            <a:fld id="{1F1C57F3-6D5B-4A94-8564-4CBCEEC88AF2}" type="slidenum">
               <a:rPr b="0" lang="en-US" sz="900" spc="-1" strike="noStrike">
                 <a:solidFill>
                   <a:srgbClr val="8b8b8b"/>
                 </a:solidFill>
                 <a:latin typeface="Calibri"/>
               </a:rPr>
-              <a:t>&lt;номер&gt;</a:t>
+              <a:t>&lt;number&gt;</a:t>
             </a:fld>
-            <a:endParaRPr b="0" lang="ru-RU" sz="900" spc="-1" strike="noStrike">
+            <a:endParaRPr b="0" lang="en-US" sz="900" spc="-1" strike="noStrike">
+              <a:latin typeface="Times New Roman"/>
+            </a:endParaRPr>
+          </a:p>
+        </p:txBody>
+      </p:sp>
+      <p:sp>
+        <p:nvSpPr>
+          <p:cNvPr id="3" name="PlaceHolder 4"/>
+          <p:cNvSpPr>
+            <a:spLocks noGrp="1"/>
+          </p:cNvSpPr>
+          <p:nvPr>
+            <p:ph type="dt" idx="3"/>
+          </p:nvPr>
+        </p:nvSpPr>
+        <p:spPr>
+          <a:xfrm>
+            <a:off x="628560" y="4767120"/>
+            <a:ext cx="2056680" cy="273240"/>
+          </a:xfrm>
+          <a:prstGeom prst="rect">
+            <a:avLst/>
+          </a:prstGeom>
+          <a:noFill/>
+          <a:ln w="0">
+            <a:noFill/>
+          </a:ln>
+        </p:spPr>
+        <p:txBody>
+          <a:bodyPr lIns="90000" rIns="90000" tIns="45000" bIns="45000" anchor="ctr">
+            <a:noAutofit/>
+          </a:bodyPr>
+          <a:lstStyle>
+            <a:lvl1pPr>
+              <a:defRPr b="0" lang="en-US" sz="1400" spc="-1" strike="noStrike">
+                <a:latin typeface="Times New Roman"/>
+              </a:defRPr>
+            </a:lvl1pPr>
+          </a:lstStyle>
+          <a:p>
+            <a:r>
+              <a:rPr b="0" lang="en-US" sz="1400" spc="-1" strike="noStrike">
+                <a:latin typeface="Times New Roman"/>
+              </a:rPr>
+              <a:t>&lt;date/time&gt;</a:t>
+            </a:r>
+            <a:endParaRPr b="0" lang="en-US" sz="1400" spc="-1" strike="noStrike">
               <a:latin typeface="Times New Roman"/>
             </a:endParaRPr>
           </a:p>
@@ -3279,9 +2966,6 @@
           </a:bodyPr>
           <a:p>
             <a:pPr marL="432000" indent="-324000">
-              <a:lnSpc>
-                <a:spcPct val="90000"/>
-              </a:lnSpc>
               <a:spcBef>
                 <a:spcPts val="1417"/>
               </a:spcBef>
@@ -3293,26 +2977,17 @@
               <a:buChar char=""/>
             </a:pPr>
             <a:r>
-              <a:rPr b="0" lang="en-US" sz="2100" spc="-1" strike="noStrike">
-                <a:solidFill>
-                  <a:srgbClr val="000000"/>
-                </a:solidFill>
-                <a:latin typeface="Calibri"/>
-              </a:rPr>
-              <a:t>Для правки структуры щёлкните мышью</a:t>
-            </a:r>
-            <a:endParaRPr b="0" lang="en-US" sz="2100" spc="-1" strike="noStrike">
-              <a:solidFill>
-                <a:srgbClr val="000000"/>
-              </a:solidFill>
-              <a:latin typeface="Calibri"/>
+              <a:rPr b="0" lang="en-US" sz="3200" spc="-1" strike="noStrike">
+                <a:latin typeface="Arial"/>
+              </a:rPr>
+              <a:t>Click to edit the outline text format</a:t>
+            </a:r>
+            <a:endParaRPr b="0" lang="en-US" sz="3200" spc="-1" strike="noStrike">
+              <a:latin typeface="Arial"/>
             </a:endParaRPr>
           </a:p>
           <a:p>
             <a:pPr lvl="1" marL="864000" indent="-324000">
-              <a:lnSpc>
-                <a:spcPct val="90000"/>
-              </a:lnSpc>
               <a:spcBef>
                 <a:spcPts val="1134"/>
               </a:spcBef>
@@ -3324,26 +2999,17 @@
               <a:buChar char=""/>
             </a:pPr>
             <a:r>
-              <a:rPr b="0" lang="en-US" sz="1500" spc="-1" strike="noStrike">
-                <a:solidFill>
-                  <a:srgbClr val="000000"/>
-                </a:solidFill>
-                <a:latin typeface="Calibri"/>
-              </a:rPr>
-              <a:t>Второй уровень структуры</a:t>
-            </a:r>
-            <a:endParaRPr b="0" lang="en-US" sz="1500" spc="-1" strike="noStrike">
-              <a:solidFill>
-                <a:srgbClr val="000000"/>
-              </a:solidFill>
-              <a:latin typeface="Calibri"/>
+              <a:rPr b="0" lang="en-US" sz="2800" spc="-1" strike="noStrike">
+                <a:latin typeface="Arial"/>
+              </a:rPr>
+              <a:t>Second Outline Level</a:t>
+            </a:r>
+            <a:endParaRPr b="0" lang="en-US" sz="2800" spc="-1" strike="noStrike">
+              <a:latin typeface="Arial"/>
             </a:endParaRPr>
           </a:p>
           <a:p>
             <a:pPr lvl="2" marL="1296000" indent="-288000">
-              <a:lnSpc>
-                <a:spcPct val="90000"/>
-              </a:lnSpc>
               <a:spcBef>
                 <a:spcPts val="850"/>
               </a:spcBef>
@@ -3355,26 +3021,17 @@
               <a:buChar char=""/>
             </a:pPr>
             <a:r>
-              <a:rPr b="0" lang="en-US" sz="1350" spc="-1" strike="noStrike">
-                <a:solidFill>
-                  <a:srgbClr val="000000"/>
-                </a:solidFill>
-                <a:latin typeface="Calibri"/>
-              </a:rPr>
-              <a:t>Третий уровень структуры</a:t>
-            </a:r>
-            <a:endParaRPr b="0" lang="en-US" sz="1350" spc="-1" strike="noStrike">
-              <a:solidFill>
-                <a:srgbClr val="000000"/>
-              </a:solidFill>
-              <a:latin typeface="Calibri"/>
+              <a:rPr b="0" lang="en-US" sz="2400" spc="-1" strike="noStrike">
+                <a:latin typeface="Arial"/>
+              </a:rPr>
+              <a:t>Third Outline Level</a:t>
+            </a:r>
+            <a:endParaRPr b="0" lang="en-US" sz="2400" spc="-1" strike="noStrike">
+              <a:latin typeface="Arial"/>
             </a:endParaRPr>
           </a:p>
           <a:p>
             <a:pPr lvl="3" marL="1728000" indent="-216000">
-              <a:lnSpc>
-                <a:spcPct val="90000"/>
-              </a:lnSpc>
               <a:spcBef>
                 <a:spcPts val="567"/>
               </a:spcBef>
@@ -3386,26 +3043,17 @@
               <a:buChar char=""/>
             </a:pPr>
             <a:r>
-              <a:rPr b="0" lang="en-US" sz="1350" spc="-1" strike="noStrike">
-                <a:solidFill>
-                  <a:srgbClr val="000000"/>
-                </a:solidFill>
-                <a:latin typeface="Calibri"/>
-              </a:rPr>
-              <a:t>Четвёртый уровень структуры</a:t>
-            </a:r>
-            <a:endParaRPr b="0" lang="en-US" sz="1350" spc="-1" strike="noStrike">
-              <a:solidFill>
-                <a:srgbClr val="000000"/>
-              </a:solidFill>
-              <a:latin typeface="Calibri"/>
+              <a:rPr b="0" lang="en-US" sz="2000" spc="-1" strike="noStrike">
+                <a:latin typeface="Arial"/>
+              </a:rPr>
+              <a:t>Fourth Outline Level</a:t>
+            </a:r>
+            <a:endParaRPr b="0" lang="en-US" sz="2000" spc="-1" strike="noStrike">
+              <a:latin typeface="Arial"/>
             </a:endParaRPr>
           </a:p>
           <a:p>
             <a:pPr lvl="4" marL="2160000" indent="-216000">
-              <a:lnSpc>
-                <a:spcPct val="90000"/>
-              </a:lnSpc>
               <a:spcBef>
                 <a:spcPts val="283"/>
               </a:spcBef>
@@ -3418,25 +3066,16 @@
             </a:pPr>
             <a:r>
               <a:rPr b="0" lang="en-US" sz="2000" spc="-1" strike="noStrike">
-                <a:solidFill>
-                  <a:srgbClr val="000000"/>
-                </a:solidFill>
-                <a:latin typeface="Calibri"/>
-              </a:rPr>
-              <a:t>Пятый уровень структуры</a:t>
+                <a:latin typeface="Arial"/>
+              </a:rPr>
+              <a:t>Fifth Outline Level</a:t>
             </a:r>
             <a:endParaRPr b="0" lang="en-US" sz="2000" spc="-1" strike="noStrike">
-              <a:solidFill>
-                <a:srgbClr val="000000"/>
-              </a:solidFill>
-              <a:latin typeface="Calibri"/>
+              <a:latin typeface="Arial"/>
             </a:endParaRPr>
           </a:p>
           <a:p>
             <a:pPr lvl="5" marL="2592000" indent="-216000">
-              <a:lnSpc>
-                <a:spcPct val="90000"/>
-              </a:lnSpc>
               <a:spcBef>
                 <a:spcPts val="283"/>
               </a:spcBef>
@@ -3449,25 +3088,16 @@
             </a:pPr>
             <a:r>
               <a:rPr b="0" lang="en-US" sz="2000" spc="-1" strike="noStrike">
-                <a:solidFill>
-                  <a:srgbClr val="000000"/>
-                </a:solidFill>
-                <a:latin typeface="Calibri"/>
-              </a:rPr>
-              <a:t>Шестой уровень структуры</a:t>
+                <a:latin typeface="Arial"/>
+              </a:rPr>
+              <a:t>Sixth Outline Level</a:t>
             </a:r>
             <a:endParaRPr b="0" lang="en-US" sz="2000" spc="-1" strike="noStrike">
-              <a:solidFill>
-                <a:srgbClr val="000000"/>
-              </a:solidFill>
-              <a:latin typeface="Calibri"/>
+              <a:latin typeface="Arial"/>
             </a:endParaRPr>
           </a:p>
           <a:p>
             <a:pPr lvl="6" marL="3024000" indent="-216000">
-              <a:lnSpc>
-                <a:spcPct val="90000"/>
-              </a:lnSpc>
               <a:spcBef>
                 <a:spcPts val="283"/>
               </a:spcBef>
@@ -3480,18 +3110,12 @@
             </a:pPr>
             <a:r>
               <a:rPr b="0" lang="en-US" sz="2000" spc="-1" strike="noStrike">
-                <a:solidFill>
-                  <a:srgbClr val="000000"/>
-                </a:solidFill>
-                <a:latin typeface="Calibri"/>
-              </a:rPr>
-              <a:t>Седьмой уровень структуры</a:t>
+                <a:latin typeface="Arial"/>
+              </a:rPr>
+              <a:t>Seventh Outline Level</a:t>
             </a:r>
             <a:endParaRPr b="0" lang="en-US" sz="2000" spc="-1" strike="noStrike">
-              <a:solidFill>
-                <a:srgbClr val="000000"/>
-              </a:solidFill>
-              <a:latin typeface="Calibri"/>
+              <a:latin typeface="Arial"/>
             </a:endParaRPr>
           </a:p>
         </p:txBody>
@@ -3549,7 +3173,7 @@
         <p:spPr>
           <a:xfrm>
             <a:off x="186840" y="185400"/>
-            <a:ext cx="8770320" cy="4758120"/>
+            <a:ext cx="8769960" cy="4757760"/>
           </a:xfrm>
           <a:prstGeom prst="roundRect">
             <a:avLst>
@@ -3587,7 +3211,7 @@
         <p:spPr>
           <a:xfrm>
             <a:off x="460080" y="658080"/>
-            <a:ext cx="8469000" cy="3306960"/>
+            <a:ext cx="8468640" cy="3306600"/>
           </a:xfrm>
           <a:prstGeom prst="rect">
             <a:avLst/>
@@ -3624,58 +3248,7 @@
               </a:rPr>
               <a:t>TITLE</a:t>
             </a:r>
-            <a:endParaRPr b="0" lang="ru-RU" sz="5400" spc="-1" strike="noStrike">
-              <a:latin typeface="Arial"/>
-            </a:endParaRPr>
-          </a:p>
-        </p:txBody>
-      </p:sp>
-      <p:sp>
-        <p:nvSpPr>
-          <p:cNvPr id="49" name="Прямоугольник 5"/>
-          <p:cNvSpPr/>
-          <p:nvPr/>
-        </p:nvSpPr>
-        <p:spPr>
-          <a:xfrm>
-            <a:off x="460080" y="358920"/>
-            <a:ext cx="2999160" cy="269640"/>
-          </a:xfrm>
-          <a:prstGeom prst="rect">
-            <a:avLst/>
-          </a:prstGeom>
-          <a:noFill/>
-          <a:ln w="0">
-            <a:noFill/>
-          </a:ln>
-        </p:spPr>
-        <p:style>
-          <a:lnRef idx="0"/>
-          <a:fillRef idx="0"/>
-          <a:effectRef idx="0"/>
-          <a:fontRef idx="minor"/>
-        </p:style>
-        <p:txBody>
-          <a:bodyPr lIns="90000" rIns="90000" tIns="45000" bIns="45000" anchor="t">
-            <a:noAutofit/>
-          </a:bodyPr>
-          <a:p>
-            <a:pPr>
-              <a:lnSpc>
-                <a:spcPts val="1650"/>
-              </a:lnSpc>
-              <a:buNone/>
-            </a:pPr>
-            <a:r>
-              <a:rPr b="0" lang="ru-RU" sz="1400" spc="-1" strike="noStrike">
-                <a:solidFill>
-                  <a:srgbClr val="f2f2f2"/>
-                </a:solidFill>
-                <a:latin typeface="Arial"/>
-              </a:rPr>
-              <a:t>Тема:</a:t>
-            </a:r>
-            <a:endParaRPr b="0" lang="ru-RU" sz="1400" spc="-1" strike="noStrike">
+            <a:endParaRPr b="0" lang="en-US" sz="5400" spc="-1" strike="noStrike">
               <a:latin typeface="Arial"/>
             </a:endParaRPr>
           </a:p>
@@ -3720,14 +3293,14 @@
       </p:grpSpPr>
       <p:sp>
         <p:nvSpPr>
-          <p:cNvPr id="50" name="Прямоугольник со скругленными углами 3"/>
+          <p:cNvPr id="49" name="Прямоугольник со скругленными углами 3"/>
           <p:cNvSpPr/>
           <p:nvPr/>
         </p:nvSpPr>
         <p:spPr>
           <a:xfrm>
             <a:off x="3507480" y="0"/>
-            <a:ext cx="5636160" cy="5143320"/>
+            <a:ext cx="5635800" cy="5142960"/>
           </a:xfrm>
           <a:prstGeom prst="roundRect">
             <a:avLst>
@@ -3776,22 +3349,22 @@
               </a:rPr>
               <a:t>PIC</a:t>
             </a:r>
-            <a:endParaRPr b="0" lang="ru-RU" sz="1800" spc="-1" strike="noStrike">
-              <a:latin typeface="Arial"/>
-            </a:endParaRPr>
-          </a:p>
-        </p:txBody>
-      </p:sp>
-      <p:sp>
-        <p:nvSpPr>
-          <p:cNvPr id="51" name="Прямоугольник: скругленные углы 2"/>
+            <a:endParaRPr b="0" lang="en-US" sz="1800" spc="-1" strike="noStrike">
+              <a:latin typeface="Arial"/>
+            </a:endParaRPr>
+          </a:p>
+        </p:txBody>
+      </p:sp>
+      <p:sp>
+        <p:nvSpPr>
+          <p:cNvPr id="50" name="Прямоугольник: скругленные углы 2"/>
           <p:cNvSpPr/>
           <p:nvPr/>
         </p:nvSpPr>
         <p:spPr>
           <a:xfrm>
             <a:off x="3722040" y="257040"/>
-            <a:ext cx="5186160" cy="4650120"/>
+            <a:ext cx="5185800" cy="4649760"/>
           </a:xfrm>
           <a:prstGeom prst="roundRect">
             <a:avLst>
@@ -3825,14 +3398,14 @@
       </p:sp>
       <p:sp>
         <p:nvSpPr>
-          <p:cNvPr id="52" name="Овал 1"/>
+          <p:cNvPr id="51" name="Овал 1"/>
           <p:cNvSpPr/>
           <p:nvPr/>
         </p:nvSpPr>
         <p:spPr>
           <a:xfrm>
             <a:off x="4122000" y="631080"/>
-            <a:ext cx="899640" cy="899640"/>
+            <a:ext cx="899280" cy="899280"/>
           </a:xfrm>
           <a:prstGeom prst="ellipse">
             <a:avLst/>
@@ -3875,25 +3448,26 @@
                   <a:srgbClr val="ffffff"/>
                 </a:solidFill>
                 <a:latin typeface="Calibri"/>
+                <a:ea typeface="DejaVu Sans"/>
               </a:rPr>
               <a:t>01</a:t>
             </a:r>
-            <a:endParaRPr b="0" lang="ru-RU" sz="1800" spc="-1" strike="noStrike">
-              <a:latin typeface="Arial"/>
-            </a:endParaRPr>
-          </a:p>
-        </p:txBody>
-      </p:sp>
-      <p:sp>
-        <p:nvSpPr>
-          <p:cNvPr id="53" name="Овал 23"/>
+            <a:endParaRPr b="0" lang="en-US" sz="1800" spc="-1" strike="noStrike">
+              <a:latin typeface="Arial"/>
+            </a:endParaRPr>
+          </a:p>
+        </p:txBody>
+      </p:sp>
+      <p:sp>
+        <p:nvSpPr>
+          <p:cNvPr id="52" name="Овал 23"/>
           <p:cNvSpPr/>
           <p:nvPr/>
         </p:nvSpPr>
         <p:spPr>
           <a:xfrm>
             <a:off x="4122000" y="2127600"/>
-            <a:ext cx="899640" cy="887760"/>
+            <a:ext cx="899280" cy="887400"/>
           </a:xfrm>
           <a:prstGeom prst="ellipse">
             <a:avLst/>
@@ -3936,25 +3510,26 @@
                   <a:srgbClr val="ffffff"/>
                 </a:solidFill>
                 <a:latin typeface="Calibri"/>
+                <a:ea typeface="DejaVu Sans"/>
               </a:rPr>
               <a:t>02</a:t>
             </a:r>
-            <a:endParaRPr b="0" lang="ru-RU" sz="1800" spc="-1" strike="noStrike">
-              <a:latin typeface="Arial"/>
-            </a:endParaRPr>
-          </a:p>
-        </p:txBody>
-      </p:sp>
-      <p:sp>
-        <p:nvSpPr>
-          <p:cNvPr id="54" name="Овал 29"/>
+            <a:endParaRPr b="0" lang="en-US" sz="1800" spc="-1" strike="noStrike">
+              <a:latin typeface="Arial"/>
+            </a:endParaRPr>
+          </a:p>
+        </p:txBody>
+      </p:sp>
+      <p:sp>
+        <p:nvSpPr>
+          <p:cNvPr id="53" name="Овал 29"/>
           <p:cNvSpPr/>
           <p:nvPr/>
         </p:nvSpPr>
         <p:spPr>
           <a:xfrm>
             <a:off x="4122000" y="3612240"/>
-            <a:ext cx="899640" cy="899640"/>
+            <a:ext cx="899280" cy="899280"/>
           </a:xfrm>
           <a:prstGeom prst="ellipse">
             <a:avLst/>
@@ -3997,25 +3572,26 @@
                   <a:srgbClr val="ffffff"/>
                 </a:solidFill>
                 <a:latin typeface="Calibri"/>
+                <a:ea typeface="DejaVu Sans"/>
               </a:rPr>
               <a:t>03</a:t>
             </a:r>
-            <a:endParaRPr b="0" lang="ru-RU" sz="1800" spc="-1" strike="noStrike">
-              <a:latin typeface="Arial"/>
-            </a:endParaRPr>
-          </a:p>
-        </p:txBody>
-      </p:sp>
-      <p:sp>
-        <p:nvSpPr>
-          <p:cNvPr id="55" name="TextBox 10"/>
+            <a:endParaRPr b="0" lang="en-US" sz="1800" spc="-1" strike="noStrike">
+              <a:latin typeface="Arial"/>
+            </a:endParaRPr>
+          </a:p>
+        </p:txBody>
+      </p:sp>
+      <p:sp>
+        <p:nvSpPr>
+          <p:cNvPr id="54" name="TextBox 10"/>
           <p:cNvSpPr/>
           <p:nvPr/>
         </p:nvSpPr>
         <p:spPr>
           <a:xfrm>
             <a:off x="5110920" y="489600"/>
-            <a:ext cx="3579120" cy="550800"/>
+            <a:ext cx="3578760" cy="550440"/>
           </a:xfrm>
           <a:prstGeom prst="rect">
             <a:avLst/>
@@ -4062,22 +3638,22 @@
               </a:rPr>
               <a:t>1</a:t>
             </a:r>
-            <a:endParaRPr b="0" lang="ru-RU" sz="1400" spc="-1" strike="noStrike">
-              <a:latin typeface="Arial"/>
-            </a:endParaRPr>
-          </a:p>
-        </p:txBody>
-      </p:sp>
-      <p:sp>
-        <p:nvSpPr>
-          <p:cNvPr id="56" name="TextBox 10"/>
+            <a:endParaRPr b="0" lang="en-US" sz="1400" spc="-1" strike="noStrike">
+              <a:latin typeface="Arial"/>
+            </a:endParaRPr>
+          </a:p>
+        </p:txBody>
+      </p:sp>
+      <p:sp>
+        <p:nvSpPr>
+          <p:cNvPr id="55" name="TextBox 10"/>
           <p:cNvSpPr/>
           <p:nvPr/>
         </p:nvSpPr>
         <p:spPr>
           <a:xfrm>
             <a:off x="5110920" y="1025280"/>
-            <a:ext cx="3579120" cy="789840"/>
+            <a:ext cx="3578760" cy="789480"/>
           </a:xfrm>
           <a:prstGeom prst="rect">
             <a:avLst/>
@@ -4124,22 +3700,22 @@
               </a:rPr>
               <a:t>1</a:t>
             </a:r>
-            <a:endParaRPr b="0" lang="ru-RU" sz="1100" spc="-1" strike="noStrike">
-              <a:latin typeface="Arial"/>
-            </a:endParaRPr>
-          </a:p>
-        </p:txBody>
-      </p:sp>
-      <p:sp>
-        <p:nvSpPr>
-          <p:cNvPr id="57" name="TextBox 10"/>
+            <a:endParaRPr b="0" lang="en-US" sz="1100" spc="-1" strike="noStrike">
+              <a:latin typeface="Arial"/>
+            </a:endParaRPr>
+          </a:p>
+        </p:txBody>
+      </p:sp>
+      <p:sp>
+        <p:nvSpPr>
+          <p:cNvPr id="56" name="TextBox 10"/>
           <p:cNvSpPr/>
           <p:nvPr/>
         </p:nvSpPr>
         <p:spPr>
           <a:xfrm>
             <a:off x="5107320" y="1985400"/>
-            <a:ext cx="3579120" cy="550800"/>
+            <a:ext cx="3578760" cy="550440"/>
           </a:xfrm>
           <a:prstGeom prst="rect">
             <a:avLst/>
@@ -4176,22 +3752,22 @@
               </a:rPr>
               <a:t>SUBTITLE2</a:t>
             </a:r>
-            <a:endParaRPr b="0" lang="ru-RU" sz="1400" spc="-1" strike="noStrike">
-              <a:latin typeface="Arial"/>
-            </a:endParaRPr>
-          </a:p>
-        </p:txBody>
-      </p:sp>
-      <p:sp>
-        <p:nvSpPr>
-          <p:cNvPr id="58" name="TextBox 10"/>
+            <a:endParaRPr b="0" lang="en-US" sz="1400" spc="-1" strike="noStrike">
+              <a:latin typeface="Arial"/>
+            </a:endParaRPr>
+          </a:p>
+        </p:txBody>
+      </p:sp>
+      <p:sp>
+        <p:nvSpPr>
+          <p:cNvPr id="57" name="TextBox 10"/>
           <p:cNvSpPr/>
           <p:nvPr/>
         </p:nvSpPr>
         <p:spPr>
           <a:xfrm>
             <a:off x="5107320" y="2517840"/>
-            <a:ext cx="3579120" cy="843480"/>
+            <a:ext cx="3578760" cy="843120"/>
           </a:xfrm>
           <a:prstGeom prst="rect">
             <a:avLst/>
@@ -4238,22 +3814,22 @@
               </a:rPr>
               <a:t>2</a:t>
             </a:r>
-            <a:endParaRPr b="0" lang="ru-RU" sz="1100" spc="-1" strike="noStrike">
-              <a:latin typeface="Arial"/>
-            </a:endParaRPr>
-          </a:p>
-        </p:txBody>
-      </p:sp>
-      <p:sp>
-        <p:nvSpPr>
-          <p:cNvPr id="59" name="TextBox 10"/>
+            <a:endParaRPr b="0" lang="en-US" sz="1100" spc="-1" strike="noStrike">
+              <a:latin typeface="Arial"/>
+            </a:endParaRPr>
+          </a:p>
+        </p:txBody>
+      </p:sp>
+      <p:sp>
+        <p:nvSpPr>
+          <p:cNvPr id="58" name="TextBox 10"/>
           <p:cNvSpPr/>
           <p:nvPr/>
         </p:nvSpPr>
         <p:spPr>
           <a:xfrm>
             <a:off x="5107320" y="3470760"/>
-            <a:ext cx="3579120" cy="550800"/>
+            <a:ext cx="3578760" cy="550440"/>
           </a:xfrm>
           <a:prstGeom prst="rect">
             <a:avLst/>
@@ -4290,22 +3866,22 @@
               </a:rPr>
               <a:t>SUBTITLE3</a:t>
             </a:r>
-            <a:endParaRPr b="0" lang="ru-RU" sz="1400" spc="-1" strike="noStrike">
-              <a:latin typeface="Arial"/>
-            </a:endParaRPr>
-          </a:p>
-        </p:txBody>
-      </p:sp>
-      <p:sp>
-        <p:nvSpPr>
-          <p:cNvPr id="60" name="TextBox 10"/>
+            <a:endParaRPr b="0" lang="en-US" sz="1400" spc="-1" strike="noStrike">
+              <a:latin typeface="Arial"/>
+            </a:endParaRPr>
+          </a:p>
+        </p:txBody>
+      </p:sp>
+      <p:sp>
+        <p:nvSpPr>
+          <p:cNvPr id="59" name="TextBox 10"/>
           <p:cNvSpPr/>
           <p:nvPr/>
         </p:nvSpPr>
         <p:spPr>
           <a:xfrm>
             <a:off x="5107320" y="4003560"/>
-            <a:ext cx="3579120" cy="794880"/>
+            <a:ext cx="3578760" cy="794520"/>
           </a:xfrm>
           <a:prstGeom prst="rect">
             <a:avLst/>
@@ -4352,22 +3928,22 @@
               </a:rPr>
               <a:t>3</a:t>
             </a:r>
-            <a:endParaRPr b="0" lang="ru-RU" sz="1100" spc="-1" strike="noStrike">
-              <a:latin typeface="Arial"/>
-            </a:endParaRPr>
-          </a:p>
-        </p:txBody>
-      </p:sp>
-      <p:sp>
-        <p:nvSpPr>
-          <p:cNvPr id="61" name="TextBox 13"/>
+            <a:endParaRPr b="0" lang="en-US" sz="1100" spc="-1" strike="noStrike">
+              <a:latin typeface="Arial"/>
+            </a:endParaRPr>
+          </a:p>
+        </p:txBody>
+      </p:sp>
+      <p:sp>
+        <p:nvSpPr>
+          <p:cNvPr id="60" name="TextBox 13"/>
           <p:cNvSpPr/>
           <p:nvPr/>
         </p:nvSpPr>
         <p:spPr>
           <a:xfrm>
             <a:off x="165960" y="200880"/>
-            <a:ext cx="3148200" cy="1842120"/>
+            <a:ext cx="3147840" cy="1841760"/>
           </a:xfrm>
           <a:prstGeom prst="rect">
             <a:avLst/>
@@ -4400,10 +3976,11 @@
                   <a:srgbClr val="ffffff"/>
                 </a:solidFill>
                 <a:latin typeface="Arial"/>
+                <a:ea typeface="DejaVu Sans"/>
               </a:rPr>
               <a:t>TITLE</a:t>
             </a:r>
-            <a:endParaRPr b="0" lang="ru-RU" sz="2200" spc="-1" strike="noStrike">
+            <a:endParaRPr b="0" lang="en-US" sz="2200" spc="-1" strike="noStrike">
               <a:latin typeface="Arial"/>
             </a:endParaRPr>
           </a:p>
@@ -4448,14 +4025,14 @@
       </p:grpSpPr>
       <p:sp>
         <p:nvSpPr>
-          <p:cNvPr id="62" name="Прямоугольник со скругленными углами 3"/>
+          <p:cNvPr id="61" name="Прямоугольник со скругленными углами 3"/>
           <p:cNvSpPr/>
           <p:nvPr/>
         </p:nvSpPr>
         <p:spPr>
           <a:xfrm>
             <a:off x="0" y="0"/>
-            <a:ext cx="9143640" cy="1961640"/>
+            <a:ext cx="9143280" cy="1961280"/>
           </a:xfrm>
           <a:prstGeom prst="roundRect">
             <a:avLst>
@@ -4506,22 +4083,22 @@
               </a:rPr>
               <a:t>PIC</a:t>
             </a:r>
-            <a:endParaRPr b="0" lang="ru-RU" sz="1800" spc="-1" strike="noStrike">
-              <a:latin typeface="Arial"/>
-            </a:endParaRPr>
-          </a:p>
-        </p:txBody>
-      </p:sp>
-      <p:sp>
-        <p:nvSpPr>
-          <p:cNvPr id="63" name="TextBox 10"/>
+            <a:endParaRPr b="0" lang="en-US" sz="1800" spc="-1" strike="noStrike">
+              <a:latin typeface="Arial"/>
+            </a:endParaRPr>
+          </a:p>
+        </p:txBody>
+      </p:sp>
+      <p:sp>
+        <p:nvSpPr>
+          <p:cNvPr id="62" name="TextBox 10"/>
           <p:cNvSpPr/>
           <p:nvPr/>
         </p:nvSpPr>
         <p:spPr>
           <a:xfrm>
             <a:off x="384840" y="2571840"/>
-            <a:ext cx="2665080" cy="713880"/>
+            <a:ext cx="2664720" cy="713520"/>
           </a:xfrm>
           <a:prstGeom prst="rect">
             <a:avLst/>
@@ -4558,22 +4135,22 @@
               </a:rPr>
               <a:t>SUBTITLE1</a:t>
             </a:r>
-            <a:endParaRPr b="0" lang="ru-RU" sz="1400" spc="-1" strike="noStrike">
-              <a:latin typeface="Arial"/>
-            </a:endParaRPr>
-          </a:p>
-        </p:txBody>
-      </p:sp>
-      <p:sp>
-        <p:nvSpPr>
-          <p:cNvPr id="64" name="TextBox 10"/>
+            <a:endParaRPr b="0" lang="en-US" sz="1400" spc="-1" strike="noStrike">
+              <a:latin typeface="Arial"/>
+            </a:endParaRPr>
+          </a:p>
+        </p:txBody>
+      </p:sp>
+      <p:sp>
+        <p:nvSpPr>
+          <p:cNvPr id="63" name="TextBox 10"/>
           <p:cNvSpPr/>
           <p:nvPr/>
         </p:nvSpPr>
         <p:spPr>
           <a:xfrm>
             <a:off x="384840" y="3356280"/>
-            <a:ext cx="2665080" cy="1565280"/>
+            <a:ext cx="2664720" cy="1564920"/>
           </a:xfrm>
           <a:prstGeom prst="rect">
             <a:avLst/>
@@ -4620,22 +4197,22 @@
               </a:rPr>
               <a:t>1</a:t>
             </a:r>
-            <a:endParaRPr b="0" lang="ru-RU" sz="1100" spc="-1" strike="noStrike">
-              <a:latin typeface="Arial"/>
-            </a:endParaRPr>
-          </a:p>
-        </p:txBody>
-      </p:sp>
-      <p:sp>
-        <p:nvSpPr>
-          <p:cNvPr id="65" name="TextBox 10"/>
+            <a:endParaRPr b="0" lang="en-US" sz="1100" spc="-1" strike="noStrike">
+              <a:latin typeface="Arial"/>
+            </a:endParaRPr>
+          </a:p>
+        </p:txBody>
+      </p:sp>
+      <p:sp>
+        <p:nvSpPr>
+          <p:cNvPr id="64" name="TextBox 10"/>
           <p:cNvSpPr/>
           <p:nvPr/>
         </p:nvSpPr>
         <p:spPr>
           <a:xfrm>
             <a:off x="3239280" y="2571840"/>
-            <a:ext cx="2665080" cy="713880"/>
+            <a:ext cx="2664720" cy="713520"/>
           </a:xfrm>
           <a:prstGeom prst="rect">
             <a:avLst/>
@@ -4672,22 +4249,22 @@
               </a:rPr>
               <a:t>SUBTITLE2</a:t>
             </a:r>
-            <a:endParaRPr b="0" lang="ru-RU" sz="1400" spc="-1" strike="noStrike">
-              <a:latin typeface="Arial"/>
-            </a:endParaRPr>
-          </a:p>
-        </p:txBody>
-      </p:sp>
-      <p:sp>
-        <p:nvSpPr>
-          <p:cNvPr id="66" name="TextBox 10"/>
+            <a:endParaRPr b="0" lang="en-US" sz="1400" spc="-1" strike="noStrike">
+              <a:latin typeface="Arial"/>
+            </a:endParaRPr>
+          </a:p>
+        </p:txBody>
+      </p:sp>
+      <p:sp>
+        <p:nvSpPr>
+          <p:cNvPr id="65" name="TextBox 10"/>
           <p:cNvSpPr/>
           <p:nvPr/>
         </p:nvSpPr>
         <p:spPr>
           <a:xfrm>
             <a:off x="3239280" y="3356280"/>
-            <a:ext cx="2665080" cy="1565280"/>
+            <a:ext cx="2664720" cy="1564920"/>
           </a:xfrm>
           <a:prstGeom prst="rect">
             <a:avLst/>
@@ -4734,22 +4311,22 @@
               </a:rPr>
               <a:t>2</a:t>
             </a:r>
-            <a:endParaRPr b="0" lang="ru-RU" sz="1100" spc="-1" strike="noStrike">
-              <a:latin typeface="Arial"/>
-            </a:endParaRPr>
-          </a:p>
-        </p:txBody>
-      </p:sp>
-      <p:sp>
-        <p:nvSpPr>
-          <p:cNvPr id="67" name="TextBox 10"/>
+            <a:endParaRPr b="0" lang="en-US" sz="1100" spc="-1" strike="noStrike">
+              <a:latin typeface="Arial"/>
+            </a:endParaRPr>
+          </a:p>
+        </p:txBody>
+      </p:sp>
+      <p:sp>
+        <p:nvSpPr>
+          <p:cNvPr id="66" name="TextBox 10"/>
           <p:cNvSpPr/>
           <p:nvPr/>
         </p:nvSpPr>
         <p:spPr>
           <a:xfrm>
             <a:off x="6093720" y="2571840"/>
-            <a:ext cx="2665080" cy="713880"/>
+            <a:ext cx="2664720" cy="713520"/>
           </a:xfrm>
           <a:prstGeom prst="rect">
             <a:avLst/>
@@ -4786,22 +4363,22 @@
               </a:rPr>
               <a:t>SUBTITLE3</a:t>
             </a:r>
-            <a:endParaRPr b="0" lang="ru-RU" sz="1400" spc="-1" strike="noStrike">
-              <a:latin typeface="Arial"/>
-            </a:endParaRPr>
-          </a:p>
-        </p:txBody>
-      </p:sp>
-      <p:sp>
-        <p:nvSpPr>
-          <p:cNvPr id="68" name="TextBox 10"/>
+            <a:endParaRPr b="0" lang="en-US" sz="1400" spc="-1" strike="noStrike">
+              <a:latin typeface="Arial"/>
+            </a:endParaRPr>
+          </a:p>
+        </p:txBody>
+      </p:sp>
+      <p:sp>
+        <p:nvSpPr>
+          <p:cNvPr id="67" name="TextBox 10"/>
           <p:cNvSpPr/>
           <p:nvPr/>
         </p:nvSpPr>
         <p:spPr>
           <a:xfrm>
             <a:off x="6093720" y="3356280"/>
-            <a:ext cx="2665080" cy="1565280"/>
+            <a:ext cx="2664720" cy="1564920"/>
           </a:xfrm>
           <a:prstGeom prst="rect">
             <a:avLst/>
@@ -4848,22 +4425,22 @@
               </a:rPr>
               <a:t>3</a:t>
             </a:r>
-            <a:endParaRPr b="0" lang="ru-RU" sz="1100" spc="-1" strike="noStrike">
-              <a:latin typeface="Arial"/>
-            </a:endParaRPr>
-          </a:p>
-        </p:txBody>
-      </p:sp>
-      <p:sp>
-        <p:nvSpPr>
-          <p:cNvPr id="69" name="TextBox 9"/>
+            <a:endParaRPr b="0" lang="en-US" sz="1100" spc="-1" strike="noStrike">
+              <a:latin typeface="Arial"/>
+            </a:endParaRPr>
+          </a:p>
+        </p:txBody>
+      </p:sp>
+      <p:sp>
+        <p:nvSpPr>
+          <p:cNvPr id="68" name="TextBox 9"/>
           <p:cNvSpPr/>
           <p:nvPr/>
         </p:nvSpPr>
         <p:spPr>
           <a:xfrm>
             <a:off x="384840" y="2178000"/>
-            <a:ext cx="8465760" cy="480960"/>
+            <a:ext cx="8465400" cy="480600"/>
           </a:xfrm>
           <a:prstGeom prst="rect">
             <a:avLst/>
@@ -4896,10 +4473,11 @@
                   <a:srgbClr val="ffffff"/>
                 </a:solidFill>
                 <a:latin typeface="Arial"/>
+                <a:ea typeface="DejaVu Sans"/>
               </a:rPr>
               <a:t>TITLE</a:t>
             </a:r>
-            <a:endParaRPr b="0" lang="ru-RU" sz="2200" spc="-1" strike="noStrike">
+            <a:endParaRPr b="0" lang="en-US" sz="2200" spc="-1" strike="noStrike">
               <a:latin typeface="Arial"/>
             </a:endParaRPr>
           </a:p>
@@ -4944,14 +4522,14 @@
       </p:grpSpPr>
       <p:sp>
         <p:nvSpPr>
-          <p:cNvPr id="70" name="Прямоугольник: скругленные углы 15"/>
+          <p:cNvPr id="69" name="Прямоугольник: скругленные углы 15"/>
           <p:cNvSpPr/>
           <p:nvPr/>
         </p:nvSpPr>
         <p:spPr>
           <a:xfrm>
             <a:off x="4636440" y="250200"/>
-            <a:ext cx="4198320" cy="4625280"/>
+            <a:ext cx="4197960" cy="4624920"/>
           </a:xfrm>
           <a:prstGeom prst="roundRect">
             <a:avLst>
@@ -4998,25 +4576,26 @@
                   <a:srgbClr val="ffffff"/>
                 </a:solidFill>
                 <a:latin typeface="Calibri"/>
+                <a:ea typeface="DejaVu Sans"/>
               </a:rPr>
               <a:t>PIC</a:t>
             </a:r>
-            <a:endParaRPr b="0" lang="ru-RU" sz="1800" spc="-1" strike="noStrike">
-              <a:latin typeface="Arial"/>
-            </a:endParaRPr>
-          </a:p>
-        </p:txBody>
-      </p:sp>
-      <p:sp>
-        <p:nvSpPr>
-          <p:cNvPr id="71" name="Прямоугольник: скругленные углы 16"/>
+            <a:endParaRPr b="0" lang="en-US" sz="1800" spc="-1" strike="noStrike">
+              <a:latin typeface="Arial"/>
+            </a:endParaRPr>
+          </a:p>
+        </p:txBody>
+      </p:sp>
+      <p:sp>
+        <p:nvSpPr>
+          <p:cNvPr id="70" name="Прямоугольник: скругленные углы 16"/>
           <p:cNvSpPr/>
           <p:nvPr/>
         </p:nvSpPr>
         <p:spPr>
           <a:xfrm>
             <a:off x="329400" y="257040"/>
-            <a:ext cx="4198320" cy="4625280"/>
+            <a:ext cx="4197960" cy="4624920"/>
           </a:xfrm>
           <a:prstGeom prst="roundRect">
             <a:avLst>
@@ -5050,14 +4629,14 @@
       </p:sp>
       <p:sp>
         <p:nvSpPr>
-          <p:cNvPr id="72" name="Овал 9"/>
+          <p:cNvPr id="71" name="Овал 9"/>
           <p:cNvSpPr/>
           <p:nvPr/>
         </p:nvSpPr>
         <p:spPr>
           <a:xfrm>
             <a:off x="4272120" y="1193040"/>
-            <a:ext cx="635400" cy="635400"/>
+            <a:ext cx="635040" cy="635040"/>
           </a:xfrm>
           <a:prstGeom prst="ellipse">
             <a:avLst/>
@@ -5086,14 +4665,14 @@
       </p:sp>
       <p:sp>
         <p:nvSpPr>
-          <p:cNvPr id="73" name="TextBox 10"/>
+          <p:cNvPr id="72" name="TextBox 10"/>
           <p:cNvSpPr/>
           <p:nvPr/>
         </p:nvSpPr>
         <p:spPr>
           <a:xfrm>
             <a:off x="581760" y="828720"/>
-            <a:ext cx="3693600" cy="550800"/>
+            <a:ext cx="3693240" cy="550440"/>
           </a:xfrm>
           <a:prstGeom prst="rect">
             <a:avLst/>
@@ -5140,22 +4719,22 @@
               </a:rPr>
               <a:t>1</a:t>
             </a:r>
-            <a:endParaRPr b="0" lang="ru-RU" sz="1400" spc="-1" strike="noStrike">
-              <a:latin typeface="Arial"/>
-            </a:endParaRPr>
-          </a:p>
-        </p:txBody>
-      </p:sp>
-      <p:sp>
-        <p:nvSpPr>
-          <p:cNvPr id="74" name="TextBox 10"/>
+            <a:endParaRPr b="0" lang="en-US" sz="1400" spc="-1" strike="noStrike">
+              <a:latin typeface="Arial"/>
+            </a:endParaRPr>
+          </a:p>
+        </p:txBody>
+      </p:sp>
+      <p:sp>
+        <p:nvSpPr>
+          <p:cNvPr id="73" name="TextBox 10"/>
           <p:cNvSpPr/>
           <p:nvPr/>
         </p:nvSpPr>
         <p:spPr>
           <a:xfrm>
             <a:off x="581760" y="1364400"/>
-            <a:ext cx="3693600" cy="789840"/>
+            <a:ext cx="3693240" cy="789480"/>
           </a:xfrm>
           <a:prstGeom prst="rect">
             <a:avLst/>
@@ -5202,22 +4781,22 @@
               </a:rPr>
               <a:t>1</a:t>
             </a:r>
-            <a:endParaRPr b="0" lang="ru-RU" sz="1100" spc="-1" strike="noStrike">
-              <a:latin typeface="Arial"/>
-            </a:endParaRPr>
-          </a:p>
-        </p:txBody>
-      </p:sp>
-      <p:sp>
-        <p:nvSpPr>
-          <p:cNvPr id="75" name="TextBox 10"/>
+            <a:endParaRPr b="0" lang="en-US" sz="1100" spc="-1" strike="noStrike">
+              <a:latin typeface="Arial"/>
+            </a:endParaRPr>
+          </a:p>
+        </p:txBody>
+      </p:sp>
+      <p:sp>
+        <p:nvSpPr>
+          <p:cNvPr id="74" name="TextBox 10"/>
           <p:cNvSpPr/>
           <p:nvPr/>
         </p:nvSpPr>
         <p:spPr>
           <a:xfrm>
             <a:off x="578160" y="2154600"/>
-            <a:ext cx="3693600" cy="550800"/>
+            <a:ext cx="3693240" cy="550440"/>
           </a:xfrm>
           <a:prstGeom prst="rect">
             <a:avLst/>
@@ -5254,22 +4833,22 @@
               </a:rPr>
               <a:t>SUBTITLE2</a:t>
             </a:r>
-            <a:endParaRPr b="0" lang="ru-RU" sz="1400" spc="-1" strike="noStrike">
-              <a:latin typeface="Arial"/>
-            </a:endParaRPr>
-          </a:p>
-        </p:txBody>
-      </p:sp>
-      <p:sp>
-        <p:nvSpPr>
-          <p:cNvPr id="76" name="TextBox 10"/>
+            <a:endParaRPr b="0" lang="en-US" sz="1400" spc="-1" strike="noStrike">
+              <a:latin typeface="Arial"/>
+            </a:endParaRPr>
+          </a:p>
+        </p:txBody>
+      </p:sp>
+      <p:sp>
+        <p:nvSpPr>
+          <p:cNvPr id="75" name="TextBox 10"/>
           <p:cNvSpPr/>
           <p:nvPr/>
         </p:nvSpPr>
         <p:spPr>
           <a:xfrm>
             <a:off x="578160" y="2687040"/>
-            <a:ext cx="3693600" cy="843480"/>
+            <a:ext cx="3693240" cy="843120"/>
           </a:xfrm>
           <a:prstGeom prst="rect">
             <a:avLst/>
@@ -5316,22 +4895,22 @@
               </a:rPr>
               <a:t>2</a:t>
             </a:r>
-            <a:endParaRPr b="0" lang="ru-RU" sz="1100" spc="-1" strike="noStrike">
-              <a:latin typeface="Arial"/>
-            </a:endParaRPr>
-          </a:p>
-        </p:txBody>
-      </p:sp>
-      <p:sp>
-        <p:nvSpPr>
-          <p:cNvPr id="77" name="TextBox 10"/>
+            <a:endParaRPr b="0" lang="en-US" sz="1100" spc="-1" strike="noStrike">
+              <a:latin typeface="Arial"/>
+            </a:endParaRPr>
+          </a:p>
+        </p:txBody>
+      </p:sp>
+      <p:sp>
+        <p:nvSpPr>
+          <p:cNvPr id="76" name="TextBox 10"/>
           <p:cNvSpPr/>
           <p:nvPr/>
         </p:nvSpPr>
         <p:spPr>
           <a:xfrm>
             <a:off x="578160" y="3482280"/>
-            <a:ext cx="3693600" cy="550800"/>
+            <a:ext cx="3693240" cy="550440"/>
           </a:xfrm>
           <a:prstGeom prst="rect">
             <a:avLst/>
@@ -5368,22 +4947,22 @@
               </a:rPr>
               <a:t>SUBTITLE3</a:t>
             </a:r>
-            <a:endParaRPr b="0" lang="ru-RU" sz="1400" spc="-1" strike="noStrike">
-              <a:latin typeface="Arial"/>
-            </a:endParaRPr>
-          </a:p>
-        </p:txBody>
-      </p:sp>
-      <p:sp>
-        <p:nvSpPr>
-          <p:cNvPr id="78" name="TextBox 10"/>
+            <a:endParaRPr b="0" lang="en-US" sz="1400" spc="-1" strike="noStrike">
+              <a:latin typeface="Arial"/>
+            </a:endParaRPr>
+          </a:p>
+        </p:txBody>
+      </p:sp>
+      <p:sp>
+        <p:nvSpPr>
+          <p:cNvPr id="77" name="TextBox 10"/>
           <p:cNvSpPr/>
           <p:nvPr/>
         </p:nvSpPr>
         <p:spPr>
           <a:xfrm>
             <a:off x="578160" y="4015080"/>
-            <a:ext cx="3693600" cy="794880"/>
+            <a:ext cx="3693240" cy="794520"/>
           </a:xfrm>
           <a:prstGeom prst="rect">
             <a:avLst/>
@@ -5430,22 +5009,22 @@
               </a:rPr>
               <a:t>3</a:t>
             </a:r>
-            <a:endParaRPr b="0" lang="ru-RU" sz="1100" spc="-1" strike="noStrike">
-              <a:latin typeface="Arial"/>
-            </a:endParaRPr>
-          </a:p>
-        </p:txBody>
-      </p:sp>
-      <p:sp>
-        <p:nvSpPr>
-          <p:cNvPr id="79" name="TextBox 30"/>
+            <a:endParaRPr b="0" lang="en-US" sz="1100" spc="-1" strike="noStrike">
+              <a:latin typeface="Arial"/>
+            </a:endParaRPr>
+          </a:p>
+        </p:txBody>
+      </p:sp>
+      <p:sp>
+        <p:nvSpPr>
+          <p:cNvPr id="78" name="TextBox 30"/>
           <p:cNvSpPr/>
           <p:nvPr/>
         </p:nvSpPr>
         <p:spPr>
           <a:xfrm>
             <a:off x="553680" y="352440"/>
-            <a:ext cx="3803760" cy="789840"/>
+            <a:ext cx="3803400" cy="789480"/>
           </a:xfrm>
           <a:prstGeom prst="rect">
             <a:avLst/>
@@ -5478,10 +5057,11 @@
                   <a:srgbClr val="ffffff"/>
                 </a:solidFill>
                 <a:latin typeface="Arial"/>
+                <a:ea typeface="DejaVu Sans"/>
               </a:rPr>
               <a:t>TITLE</a:t>
             </a:r>
-            <a:endParaRPr b="0" lang="ru-RU" sz="2200" spc="-1" strike="noStrike">
+            <a:endParaRPr b="0" lang="en-US" sz="2200" spc="-1" strike="noStrike">
               <a:latin typeface="Arial"/>
             </a:endParaRPr>
           </a:p>
@@ -5526,14 +5106,14 @@
       </p:grpSpPr>
       <p:sp>
         <p:nvSpPr>
-          <p:cNvPr id="80" name="Прямоугольник со скругленными углами 3"/>
+          <p:cNvPr id="79" name="Прямоугольник со скругленными углами 3"/>
           <p:cNvSpPr/>
           <p:nvPr/>
         </p:nvSpPr>
         <p:spPr>
           <a:xfrm>
             <a:off x="186840" y="185400"/>
-            <a:ext cx="8770320" cy="4758120"/>
+            <a:ext cx="8769960" cy="4757760"/>
           </a:xfrm>
           <a:prstGeom prst="roundRect">
             <a:avLst>
@@ -5564,14 +5144,14 @@
       </p:sp>
       <p:sp>
         <p:nvSpPr>
-          <p:cNvPr id="81" name="Прямоугольник 10"/>
+          <p:cNvPr id="80" name="Прямоугольник 10"/>
           <p:cNvSpPr/>
           <p:nvPr/>
         </p:nvSpPr>
         <p:spPr>
           <a:xfrm>
             <a:off x="460080" y="658080"/>
-            <a:ext cx="8469000" cy="3306960"/>
+            <a:ext cx="8468640" cy="3306600"/>
           </a:xfrm>
           <a:prstGeom prst="rect">
             <a:avLst/>
@@ -5608,7 +5188,7 @@
               </a:rPr>
               <a:t>TITLE</a:t>
             </a:r>
-            <a:endParaRPr b="0" lang="ru-RU" sz="5400" spc="-1" strike="noStrike">
+            <a:endParaRPr b="0" lang="en-US" sz="5400" spc="-1" strike="noStrike">
               <a:latin typeface="Arial"/>
             </a:endParaRPr>
           </a:p>
